--- a/docs/ppts/AI智能面试助手-技术分享.pptx
+++ b/docs/ppts/AI智能面试助手-技术分享.pptx
@@ -3153,7 +3153,7 @@
         </p:nvSpPr>
         <p:spPr>
           <a:xfrm>
-            <a:off x="0" y="2377440"/>
+            <a:off x="0" y="2286000"/>
             <a:ext cx="12191695" cy="1097280"/>
           </a:xfrm>
           <a:prstGeom prst="rect">
@@ -3162,7 +3162,7 @@
           <a:noFill/>
         </p:spPr>
         <p:txBody>
-          <a:bodyPr wrap="square" anchor="t">
+          <a:bodyPr wrap="square">
             <a:spAutoFit/>
           </a:bodyPr>
           <a:lstStyle/>
@@ -3189,7 +3189,7 @@
         </p:nvSpPr>
         <p:spPr>
           <a:xfrm>
-            <a:off x="0" y="3383280"/>
+            <a:off x="0" y="3291840"/>
             <a:ext cx="12191695" cy="640080"/>
           </a:xfrm>
           <a:prstGeom prst="rect">
@@ -3198,7 +3198,7 @@
           <a:noFill/>
         </p:spPr>
         <p:txBody>
-          <a:bodyPr wrap="square" anchor="t">
+          <a:bodyPr wrap="square">
             <a:spAutoFit/>
           </a:bodyPr>
           <a:lstStyle/>
@@ -3234,7 +3234,7 @@
           <a:noFill/>
         </p:spPr>
         <p:txBody>
-          <a:bodyPr wrap="square" anchor="t">
+          <a:bodyPr wrap="square">
             <a:spAutoFit/>
           </a:bodyPr>
           <a:lstStyle/>
@@ -3270,7 +3270,7 @@
           <a:noFill/>
         </p:spPr>
         <p:txBody>
-          <a:bodyPr wrap="square" anchor="t">
+          <a:bodyPr wrap="square">
             <a:spAutoFit/>
           </a:bodyPr>
           <a:lstStyle/>
@@ -3306,7 +3306,7 @@
           <a:noFill/>
         </p:spPr>
         <p:txBody>
-          <a:bodyPr wrap="square" anchor="t">
+          <a:bodyPr wrap="square">
             <a:spAutoFit/>
           </a:bodyPr>
           <a:lstStyle/>
@@ -3342,7 +3342,7 @@
           <a:noFill/>
         </p:spPr>
         <p:txBody>
-          <a:bodyPr wrap="square" anchor="t">
+          <a:bodyPr wrap="square">
             <a:spAutoFit/>
           </a:bodyPr>
           <a:lstStyle/>
@@ -3378,7 +3378,7 @@
           <a:noFill/>
         </p:spPr>
         <p:txBody>
-          <a:bodyPr wrap="square" anchor="t">
+          <a:bodyPr wrap="square">
             <a:spAutoFit/>
           </a:bodyPr>
           <a:lstStyle/>
@@ -3414,7 +3414,7 @@
           <a:noFill/>
         </p:spPr>
         <p:txBody>
-          <a:bodyPr wrap="square" anchor="t">
+          <a:bodyPr wrap="square">
             <a:spAutoFit/>
           </a:bodyPr>
           <a:lstStyle/>
@@ -3450,7 +3450,7 @@
           <a:noFill/>
         </p:spPr>
         <p:txBody>
-          <a:bodyPr wrap="square" anchor="t">
+          <a:bodyPr wrap="square">
             <a:spAutoFit/>
           </a:bodyPr>
           <a:lstStyle/>
@@ -3486,7 +3486,7 @@
           <a:noFill/>
         </p:spPr>
         <p:txBody>
-          <a:bodyPr wrap="square" anchor="t">
+          <a:bodyPr wrap="square">
             <a:spAutoFit/>
           </a:bodyPr>
           <a:lstStyle/>
@@ -3522,7 +3522,7 @@
           <a:noFill/>
         </p:spPr>
         <p:txBody>
-          <a:bodyPr wrap="square" anchor="t">
+          <a:bodyPr wrap="square">
             <a:spAutoFit/>
           </a:bodyPr>
           <a:lstStyle/>
@@ -3620,7 +3620,7 @@
           <a:noFill/>
         </p:spPr>
         <p:txBody>
-          <a:bodyPr wrap="square" anchor="t">
+          <a:bodyPr wrap="square">
             <a:spAutoFit/>
           </a:bodyPr>
           <a:lstStyle/>
@@ -3700,7 +3700,7 @@
           <a:noFill/>
         </p:spPr>
         <p:txBody>
-          <a:bodyPr wrap="square" anchor="t">
+          <a:bodyPr wrap="square">
             <a:spAutoFit/>
           </a:bodyPr>
           <a:lstStyle/>
@@ -3721,16 +3721,16 @@
       </p:sp>
       <p:sp>
         <p:nvSpPr>
-          <p:cNvPr id="6" name="Rectangle 5"/>
+          <p:cNvPr id="6" name="Rounded Rectangle 5"/>
           <p:cNvSpPr/>
           <p:nvPr/>
         </p:nvSpPr>
         <p:spPr>
           <a:xfrm>
-            <a:off x="822960" y="1737360"/>
-            <a:ext cx="5120640" cy="4206240"/>
-          </a:xfrm>
-          <a:prstGeom prst="rect">
+            <a:off x="822960" y="1645920"/>
+            <a:ext cx="5303520" cy="4480560"/>
+          </a:xfrm>
+          <a:prstGeom prst="roundRect">
             <a:avLst/>
           </a:prstGeom>
           <a:solidFill>
@@ -3773,16 +3773,16 @@
         </p:nvSpPr>
         <p:spPr>
           <a:xfrm>
-            <a:off x="1097280" y="1920240"/>
-            <a:ext cx="4572000" cy="457200"/>
-          </a:xfrm>
-          <a:prstGeom prst="rect">
-            <a:avLst/>
-          </a:prstGeom>
-          <a:noFill/>
-        </p:spPr>
-        <p:txBody>
-          <a:bodyPr wrap="square" anchor="t">
+            <a:off x="1097280" y="1828800"/>
+            <a:ext cx="4754880" cy="457200"/>
+          </a:xfrm>
+          <a:prstGeom prst="rect">
+            <a:avLst/>
+          </a:prstGeom>
+          <a:noFill/>
+        </p:spPr>
+        <p:txBody>
+          <a:bodyPr wrap="square">
             <a:spAutoFit/>
           </a:bodyPr>
           <a:lstStyle/>
@@ -3792,70 +3792,208 @@
               <a:rPr sz="1800" b="1">
                 <a:solidFill>
                   <a:srgbClr val="4FC3F7"/>
+                </a:solidFill>
+                <a:latin typeface="Consolas"/>
+                <a:ea typeface="Consolas"/>
+              </a:rPr>
+              <a:t>create_session</a:t>
+            </a:r>
+          </a:p>
+        </p:txBody>
+      </p:sp>
+      <p:sp>
+        <p:nvSpPr>
+          <p:cNvPr id="8" name="TextBox 7"/>
+          <p:cNvSpPr txBox="1"/>
+          <p:nvPr/>
+        </p:nvSpPr>
+        <p:spPr>
+          <a:xfrm>
+            <a:off x="1097280" y="2286000"/>
+            <a:ext cx="4754880" cy="731520"/>
+          </a:xfrm>
+          <a:prstGeom prst="rect">
+            <a:avLst/>
+          </a:prstGeom>
+          <a:noFill/>
+        </p:spPr>
+        <p:txBody>
+          <a:bodyPr wrap="square">
+            <a:spAutoFit/>
+          </a:bodyPr>
+          <a:lstStyle/>
+          <a:p>
+            <a:pPr algn="l"/>
+            <a:r>
+              <a:rPr sz="1300" b="0">
+                <a:solidFill>
+                  <a:srgbClr val="D6E4F5"/>
                 </a:solidFill>
                 <a:latin typeface="Microsoft YaHei"/>
                 <a:ea typeface="Microsoft YaHei"/>
               </a:rPr>
-              <a:t>核心设计</a:t>
-            </a:r>
-          </a:p>
-        </p:txBody>
-      </p:sp>
-      <p:sp>
-        <p:nvSpPr>
-          <p:cNvPr id="8" name="TextBox 7"/>
-          <p:cNvSpPr txBox="1"/>
-          <p:nvPr/>
-        </p:nvSpPr>
-        <p:spPr>
-          <a:xfrm>
-            <a:off x="1097280" y="2468880"/>
-            <a:ext cx="4572000" cy="3474720"/>
-          </a:xfrm>
-          <a:prstGeom prst="rect">
-            <a:avLst/>
-          </a:prstGeom>
-          <a:noFill/>
-        </p:spPr>
-        <p:txBody>
-          <a:bodyPr wrap="square" anchor="t">
-            <a:spAutoFit/>
-          </a:bodyPr>
-          <a:lstStyle/>
-          <a:p>
-            <a:pPr algn="l"/>
-            <a:r>
-              <a:rPr sz="1400" b="0">
-                <a:solidFill>
-                  <a:srgbClr val="D6E4F5"/>
+              <a:t>解析配置（模板/自定义）→ 引擎抽题 → 一次性写入全部记录 → 返回第一题</a:t>
+            </a:r>
+          </a:p>
+        </p:txBody>
+      </p:sp>
+      <p:sp>
+        <p:nvSpPr>
+          <p:cNvPr id="9" name="TextBox 8"/>
+          <p:cNvSpPr txBox="1"/>
+          <p:nvPr/>
+        </p:nvSpPr>
+        <p:spPr>
+          <a:xfrm>
+            <a:off x="1097280" y="3200400"/>
+            <a:ext cx="4754880" cy="457200"/>
+          </a:xfrm>
+          <a:prstGeom prst="rect">
+            <a:avLst/>
+          </a:prstGeom>
+          <a:noFill/>
+        </p:spPr>
+        <p:txBody>
+          <a:bodyPr wrap="square">
+            <a:spAutoFit/>
+          </a:bodyPr>
+          <a:lstStyle/>
+          <a:p>
+            <a:pPr algn="l"/>
+            <a:r>
+              <a:rPr sz="1800" b="1">
+                <a:solidFill>
+                  <a:srgbClr val="4FC3F7"/>
                 </a:solidFill>
                 <a:latin typeface="Consolas"/>
                 <a:ea typeface="Consolas"/>
               </a:rPr>
-              <a:t>create_session
-  解析配置 → 引擎抽题
-  一次性写入全部记录
-submit_answer
-  校验归属(403) 状态(409)
-  回填当前记录
-  过短回答拦截不推进
-当前题 = 第一条未答记录</a:t>
-            </a:r>
-          </a:p>
-        </p:txBody>
-      </p:sp>
-      <p:sp>
-        <p:nvSpPr>
-          <p:cNvPr id="9" name="Rectangle 8"/>
+              <a:t>submit_answer</a:t>
+            </a:r>
+          </a:p>
+        </p:txBody>
+      </p:sp>
+      <p:sp>
+        <p:nvSpPr>
+          <p:cNvPr id="10" name="TextBox 9"/>
+          <p:cNvSpPr txBox="1"/>
+          <p:nvPr/>
+        </p:nvSpPr>
+        <p:spPr>
+          <a:xfrm>
+            <a:off x="1097280" y="3657600"/>
+            <a:ext cx="4754880" cy="1097280"/>
+          </a:xfrm>
+          <a:prstGeom prst="rect">
+            <a:avLst/>
+          </a:prstGeom>
+          <a:noFill/>
+        </p:spPr>
+        <p:txBody>
+          <a:bodyPr wrap="square">
+            <a:spAutoFit/>
+          </a:bodyPr>
+          <a:lstStyle/>
+          <a:p>
+            <a:pPr algn="l"/>
+            <a:r>
+              <a:rPr sz="1300" b="0">
+                <a:solidFill>
+                  <a:srgbClr val="D6E4F5"/>
+                </a:solidFill>
+                <a:latin typeface="Microsoft YaHei"/>
+                <a:ea typeface="Microsoft YaHei"/>
+              </a:rPr>
+              <a:t>校验归属(403)+状态(409) → 找当前题 → 过短(&lt;10)拦截 → 引擎点评 → 回填 → 推进或 completed</a:t>
+            </a:r>
+          </a:p>
+        </p:txBody>
+      </p:sp>
+      <p:sp>
+        <p:nvSpPr>
+          <p:cNvPr id="11" name="TextBox 10"/>
+          <p:cNvSpPr txBox="1"/>
+          <p:nvPr/>
+        </p:nvSpPr>
+        <p:spPr>
+          <a:xfrm>
+            <a:off x="1097280" y="4937760"/>
+            <a:ext cx="4754880" cy="457200"/>
+          </a:xfrm>
+          <a:prstGeom prst="rect">
+            <a:avLst/>
+          </a:prstGeom>
+          <a:noFill/>
+        </p:spPr>
+        <p:txBody>
+          <a:bodyPr wrap="square">
+            <a:spAutoFit/>
+          </a:bodyPr>
+          <a:lstStyle/>
+          <a:p>
+            <a:pPr algn="l"/>
+            <a:r>
+              <a:rPr sz="1800" b="1">
+                <a:solidFill>
+                  <a:srgbClr val="FFB74D"/>
+                </a:solidFill>
+                <a:latin typeface="Microsoft YaHei"/>
+                <a:ea typeface="Microsoft YaHei"/>
+              </a:rPr>
+              <a:t>关键设计</a:t>
+            </a:r>
+          </a:p>
+        </p:txBody>
+      </p:sp>
+      <p:sp>
+        <p:nvSpPr>
+          <p:cNvPr id="12" name="TextBox 11"/>
+          <p:cNvSpPr txBox="1"/>
+          <p:nvPr/>
+        </p:nvSpPr>
+        <p:spPr>
+          <a:xfrm>
+            <a:off x="1097280" y="5394960"/>
+            <a:ext cx="4754880" cy="731520"/>
+          </a:xfrm>
+          <a:prstGeom prst="rect">
+            <a:avLst/>
+          </a:prstGeom>
+          <a:noFill/>
+        </p:spPr>
+        <p:txBody>
+          <a:bodyPr wrap="square">
+            <a:spAutoFit/>
+          </a:bodyPr>
+          <a:lstStyle/>
+          <a:p>
+            <a:pPr algn="l"/>
+            <a:r>
+              <a:rPr sz="1300" b="0">
+                <a:solidFill>
+                  <a:srgbClr val="8FB0D4"/>
+                </a:solidFill>
+                <a:latin typeface="Microsoft YaHei"/>
+                <a:ea typeface="Microsoft YaHei"/>
+              </a:rPr>
+              <a:t>当前题 = 第一条未答记录（状态单一来源）
+归属校验在 service 层，所有操作校验 user_id</a:t>
+            </a:r>
+          </a:p>
+        </p:txBody>
+      </p:sp>
+      <p:sp>
+        <p:nvSpPr>
+          <p:cNvPr id="13" name="Rounded Rectangle 12"/>
           <p:cNvSpPr/>
           <p:nvPr/>
         </p:nvSpPr>
         <p:spPr>
           <a:xfrm>
-            <a:off x="6309360" y="1737360"/>
-            <a:ext cx="5120640" cy="4206240"/>
-          </a:xfrm>
-          <a:prstGeom prst="rect">
+            <a:off x="6400800" y="1645920"/>
+            <a:ext cx="5029200" cy="4480560"/>
+          </a:xfrm>
+          <a:prstGeom prst="roundRect">
             <a:avLst/>
           </a:prstGeom>
           <a:solidFill>
@@ -3892,13 +4030,13 @@
       </p:sp>
       <p:sp>
         <p:nvSpPr>
-          <p:cNvPr id="10" name="TextBox 9"/>
-          <p:cNvSpPr txBox="1"/>
-          <p:nvPr/>
-        </p:nvSpPr>
-        <p:spPr>
-          <a:xfrm>
-            <a:off x="6583680" y="1920240"/>
+          <p:cNvPr id="14" name="TextBox 13"/>
+          <p:cNvSpPr txBox="1"/>
+          <p:nvPr/>
+        </p:nvSpPr>
+        <p:spPr>
+          <a:xfrm>
+            <a:off x="6675120" y="1828800"/>
             <a:ext cx="4572000" cy="457200"/>
           </a:xfrm>
           <a:prstGeom prst="rect">
@@ -3907,7 +4045,7 @@
           <a:noFill/>
         </p:spPr>
         <p:txBody>
-          <a:bodyPr wrap="square" anchor="t">
+          <a:bodyPr wrap="square">
             <a:spAutoFit/>
           </a:bodyPr>
           <a:lstStyle/>
@@ -3921,29 +4059,29 @@
                 <a:latin typeface="Microsoft YaHei"/>
                 <a:ea typeface="Microsoft YaHei"/>
               </a:rPr>
-              <a:t>状态流转</a:t>
-            </a:r>
-          </a:p>
-        </p:txBody>
-      </p:sp>
-      <p:sp>
-        <p:nvSpPr>
-          <p:cNvPr id="11" name="TextBox 10"/>
-          <p:cNvSpPr txBox="1"/>
-          <p:nvPr/>
-        </p:nvSpPr>
-        <p:spPr>
-          <a:xfrm>
-            <a:off x="6583680" y="2468880"/>
-            <a:ext cx="4572000" cy="3291840"/>
-          </a:xfrm>
-          <a:prstGeom prst="rect">
-            <a:avLst/>
-          </a:prstGeom>
-          <a:noFill/>
-        </p:spPr>
-        <p:txBody>
-          <a:bodyPr wrap="square" anchor="t">
+              <a:t>submit_answer 序列</a:t>
+            </a:r>
+          </a:p>
+        </p:txBody>
+      </p:sp>
+      <p:sp>
+        <p:nvSpPr>
+          <p:cNvPr id="15" name="TextBox 14"/>
+          <p:cNvSpPr txBox="1"/>
+          <p:nvPr/>
+        </p:nvSpPr>
+        <p:spPr>
+          <a:xfrm>
+            <a:off x="6675120" y="2377440"/>
+            <a:ext cx="4572000" cy="3474720"/>
+          </a:xfrm>
+          <a:prstGeom prst="rect">
+            <a:avLst/>
+          </a:prstGeom>
+          <a:noFill/>
+        </p:spPr>
+        <p:txBody>
+          <a:bodyPr wrap="square">
             <a:spAutoFit/>
           </a:bodyPr>
           <a:lstStyle/>
@@ -3957,14 +4095,47 @@
                 <a:latin typeface="Consolas"/>
                 <a:ea typeface="Consolas"/>
               </a:rPr>
-              <a:t>POST /interviews
-  → 创建 + 返回第一题
-POST /answer
-  → 点评 + 下一题
-POST /finish
-  → 提前结束
-GET /interviews
-  → 历史列表</a:t>
+              <a:t>client → service: submit_answer
+service → engine: evaluate_answer
+engine → service: 返回 feedback
+service → repository: 回填记录
+service → client: 点评+下一题</a:t>
+            </a:r>
+          </a:p>
+        </p:txBody>
+      </p:sp>
+      <p:sp>
+        <p:nvSpPr>
+          <p:cNvPr id="16" name="TextBox 15"/>
+          <p:cNvSpPr txBox="1"/>
+          <p:nvPr/>
+        </p:nvSpPr>
+        <p:spPr>
+          <a:xfrm>
+            <a:off x="6675120" y="5897880"/>
+            <a:ext cx="4572000" cy="365760"/>
+          </a:xfrm>
+          <a:prstGeom prst="rect">
+            <a:avLst/>
+          </a:prstGeom>
+          <a:noFill/>
+        </p:spPr>
+        <p:txBody>
+          <a:bodyPr wrap="square">
+            <a:spAutoFit/>
+          </a:bodyPr>
+          <a:lstStyle/>
+          <a:p>
+            <a:pPr algn="l"/>
+            <a:r>
+              <a:rPr sz="1300" b="0">
+                <a:solidFill>
+                  <a:srgbClr val="FFB74D"/>
+                </a:solidFill>
+                <a:latin typeface="Microsoft YaHei"/>
+                <a:ea typeface="Microsoft YaHei"/>
+              </a:rPr>
+              <a:t>每答一题：点评 → 回填 → 推进</a:t>
             </a:r>
           </a:p>
         </p:txBody>
@@ -4048,7 +4219,7 @@
           <a:noFill/>
         </p:spPr>
         <p:txBody>
-          <a:bodyPr wrap="square" anchor="t">
+          <a:bodyPr wrap="square">
             <a:spAutoFit/>
           </a:bodyPr>
           <a:lstStyle/>
@@ -4128,7 +4299,7 @@
           <a:noFill/>
         </p:spPr>
         <p:txBody>
-          <a:bodyPr wrap="square" anchor="t">
+          <a:bodyPr wrap="square">
             <a:spAutoFit/>
           </a:bodyPr>
           <a:lstStyle/>
@@ -4149,16 +4320,16 @@
       </p:sp>
       <p:sp>
         <p:nvSpPr>
-          <p:cNvPr id="6" name="Rectangle 5"/>
+          <p:cNvPr id="6" name="Rounded Rectangle 5"/>
           <p:cNvSpPr/>
           <p:nvPr/>
         </p:nvSpPr>
         <p:spPr>
           <a:xfrm>
-            <a:off x="822960" y="1737360"/>
-            <a:ext cx="5120640" cy="4206240"/>
-          </a:xfrm>
-          <a:prstGeom prst="rect">
+            <a:off x="822960" y="1645920"/>
+            <a:ext cx="5303520" cy="4480560"/>
+          </a:xfrm>
+          <a:prstGeom prst="roundRect">
             <a:avLst/>
           </a:prstGeom>
           <a:solidFill>
@@ -4201,16 +4372,16 @@
         </p:nvSpPr>
         <p:spPr>
           <a:xfrm>
-            <a:off x="1097280" y="1920240"/>
-            <a:ext cx="4572000" cy="457200"/>
-          </a:xfrm>
-          <a:prstGeom prst="rect">
-            <a:avLst/>
-          </a:prstGeom>
-          <a:noFill/>
-        </p:spPr>
-        <p:txBody>
-          <a:bodyPr wrap="square" anchor="t">
+            <a:off x="1097280" y="1828800"/>
+            <a:ext cx="4754880" cy="457200"/>
+          </a:xfrm>
+          <a:prstGeom prst="rect">
+            <a:avLst/>
+          </a:prstGeom>
+          <a:noFill/>
+        </p:spPr>
+        <p:txBody>
+          <a:bodyPr wrap="square">
             <a:spAutoFit/>
           </a:bodyPr>
           <a:lstStyle/>
@@ -4224,7 +4395,7 @@
                 <a:latin typeface="Microsoft YaHei"/>
                 <a:ea typeface="Microsoft YaHei"/>
               </a:rPr>
-              <a:t>惰性生成报告</a:t>
+              <a:t>reports 惰性生成</a:t>
             </a:r>
           </a:p>
         </p:txBody>
@@ -4237,52 +4408,226 @@
         </p:nvSpPr>
         <p:spPr>
           <a:xfrm>
-            <a:off x="1097280" y="2468880"/>
-            <a:ext cx="4572000" cy="3474720"/>
-          </a:xfrm>
-          <a:prstGeom prst="rect">
-            <a:avLst/>
-          </a:prstGeom>
-          <a:noFill/>
-        </p:spPr>
-        <p:txBody>
-          <a:bodyPr wrap="square" anchor="t">
-            <a:spAutoFit/>
-          </a:bodyPr>
-          <a:lstStyle/>
-          <a:p>
-            <a:pPr algn="l"/>
-            <a:r>
-              <a:rPr sz="1400" b="0">
+            <a:off x="1097280" y="2331720"/>
+            <a:ext cx="4754880" cy="914400"/>
+          </a:xfrm>
+          <a:prstGeom prst="rect">
+            <a:avLst/>
+          </a:prstGeom>
+          <a:noFill/>
+        </p:spPr>
+        <p:txBody>
+          <a:bodyPr wrap="square">
+            <a:spAutoFit/>
+          </a:bodyPr>
+          <a:lstStyle/>
+          <a:p>
+            <a:pPr algn="l"/>
+            <a:r>
+              <a:rPr sz="1300" b="0">
                 <a:solidFill>
                   <a:srgbClr val="D6E4F5"/>
                 </a:solidFill>
-                <a:latin typeface="Consolas"/>
-                <a:ea typeface="Consolas"/>
-              </a:rPr>
-              <a:t>get_report
-  校验归属 + 终态
-  报告缺失则生成
-generate_report
-  只存评价 + 建议
-  逐题点评取自记录
-幂等：重复查询不重复生成</a:t>
-            </a:r>
-          </a:p>
-        </p:txBody>
-      </p:sp>
-      <p:sp>
-        <p:nvSpPr>
-          <p:cNvPr id="9" name="Rectangle 8"/>
+                <a:latin typeface="Microsoft YaHei"/>
+                <a:ea typeface="Microsoft YaHei"/>
+              </a:rPr>
+              <a:t>get_report: 校验归属(403)+终态(409) → 报告缺失则生成 → 已存在直接返回（幂等）</a:t>
+            </a:r>
+          </a:p>
+        </p:txBody>
+      </p:sp>
+      <p:sp>
+        <p:nvSpPr>
+          <p:cNvPr id="9" name="TextBox 8"/>
+          <p:cNvSpPr txBox="1"/>
+          <p:nvPr/>
+        </p:nvSpPr>
+        <p:spPr>
+          <a:xfrm>
+            <a:off x="1097280" y="3383280"/>
+            <a:ext cx="4754880" cy="457200"/>
+          </a:xfrm>
+          <a:prstGeom prst="rect">
+            <a:avLst/>
+          </a:prstGeom>
+          <a:noFill/>
+        </p:spPr>
+        <p:txBody>
+          <a:bodyPr wrap="square">
+            <a:spAutoFit/>
+          </a:bodyPr>
+          <a:lstStyle/>
+          <a:p>
+            <a:pPr algn="l"/>
+            <a:r>
+              <a:rPr sz="1800" b="1">
+                <a:solidFill>
+                  <a:srgbClr val="FFB74D"/>
+                </a:solidFill>
+                <a:latin typeface="Microsoft YaHei"/>
+                <a:ea typeface="Microsoft YaHei"/>
+              </a:rPr>
+              <a:t>关键设计</a:t>
+            </a:r>
+          </a:p>
+        </p:txBody>
+      </p:sp>
+      <p:sp>
+        <p:nvSpPr>
+          <p:cNvPr id="10" name="TextBox 9"/>
+          <p:cNvSpPr txBox="1"/>
+          <p:nvPr/>
+        </p:nvSpPr>
+        <p:spPr>
+          <a:xfrm>
+            <a:off x="1097280" y="3886200"/>
+            <a:ext cx="4754880" cy="365760"/>
+          </a:xfrm>
+          <a:prstGeom prst="rect">
+            <a:avLst/>
+          </a:prstGeom>
+          <a:noFill/>
+        </p:spPr>
+        <p:txBody>
+          <a:bodyPr wrap="square">
+            <a:spAutoFit/>
+          </a:bodyPr>
+          <a:lstStyle/>
+          <a:p>
+            <a:pPr algn="l"/>
+            <a:r>
+              <a:rPr sz="1300" b="0">
+                <a:solidFill>
+                  <a:srgbClr val="8FB0D4"/>
+                </a:solidFill>
+                <a:latin typeface="Microsoft YaHei"/>
+                <a:ea typeface="Microsoft YaHei"/>
+              </a:rPr>
+              <a:t>· 报告只存总体评价 + 改进建议</a:t>
+            </a:r>
+          </a:p>
+        </p:txBody>
+      </p:sp>
+      <p:sp>
+        <p:nvSpPr>
+          <p:cNvPr id="11" name="TextBox 10"/>
+          <p:cNvSpPr txBox="1"/>
+          <p:nvPr/>
+        </p:nvSpPr>
+        <p:spPr>
+          <a:xfrm>
+            <a:off x="1097280" y="3886200"/>
+            <a:ext cx="4754880" cy="365760"/>
+          </a:xfrm>
+          <a:prstGeom prst="rect">
+            <a:avLst/>
+          </a:prstGeom>
+          <a:noFill/>
+        </p:spPr>
+        <p:txBody>
+          <a:bodyPr wrap="square">
+            <a:spAutoFit/>
+          </a:bodyPr>
+          <a:lstStyle/>
+          <a:p>
+            <a:pPr algn="l"/>
+            <a:r>
+              <a:rPr sz="1300" b="0">
+                <a:solidFill>
+                  <a:srgbClr val="8FB0D4"/>
+                </a:solidFill>
+                <a:latin typeface="Microsoft YaHei"/>
+                <a:ea typeface="Microsoft YaHei"/>
+              </a:rPr>
+              <a:t>· 逐题点评取自 InterviewRecord 不冗余</a:t>
+            </a:r>
+          </a:p>
+        </p:txBody>
+      </p:sp>
+      <p:sp>
+        <p:nvSpPr>
+          <p:cNvPr id="12" name="TextBox 11"/>
+          <p:cNvSpPr txBox="1"/>
+          <p:nvPr/>
+        </p:nvSpPr>
+        <p:spPr>
+          <a:xfrm>
+            <a:off x="1097280" y="3886200"/>
+            <a:ext cx="4754880" cy="365760"/>
+          </a:xfrm>
+          <a:prstGeom prst="rect">
+            <a:avLst/>
+          </a:prstGeom>
+          <a:noFill/>
+        </p:spPr>
+        <p:txBody>
+          <a:bodyPr wrap="square">
+            <a:spAutoFit/>
+          </a:bodyPr>
+          <a:lstStyle/>
+          <a:p>
+            <a:pPr algn="l"/>
+            <a:r>
+              <a:rPr sz="1300" b="0">
+                <a:solidFill>
+                  <a:srgbClr val="8FB0D4"/>
+                </a:solidFill>
+                <a:latin typeface="Microsoft YaHei"/>
+                <a:ea typeface="Microsoft YaHei"/>
+              </a:rPr>
+              <a:t>· 惰性生成避免反向依赖</a:t>
+            </a:r>
+          </a:p>
+        </p:txBody>
+      </p:sp>
+      <p:sp>
+        <p:nvSpPr>
+          <p:cNvPr id="13" name="TextBox 12"/>
+          <p:cNvSpPr txBox="1"/>
+          <p:nvPr/>
+        </p:nvSpPr>
+        <p:spPr>
+          <a:xfrm>
+            <a:off x="1097280" y="3886200"/>
+            <a:ext cx="4754880" cy="365760"/>
+          </a:xfrm>
+          <a:prstGeom prst="rect">
+            <a:avLst/>
+          </a:prstGeom>
+          <a:noFill/>
+        </p:spPr>
+        <p:txBody>
+          <a:bodyPr wrap="square">
+            <a:spAutoFit/>
+          </a:bodyPr>
+          <a:lstStyle/>
+          <a:p>
+            <a:pPr algn="l"/>
+            <a:r>
+              <a:rPr sz="1300" b="0">
+                <a:solidFill>
+                  <a:srgbClr val="8FB0D4"/>
+                </a:solidFill>
+                <a:latin typeface="Microsoft YaHei"/>
+                <a:ea typeface="Microsoft YaHei"/>
+              </a:rPr>
+              <a:t>· finished 报告仅含已作答题目</a:t>
+            </a:r>
+          </a:p>
+        </p:txBody>
+      </p:sp>
+      <p:sp>
+        <p:nvSpPr>
+          <p:cNvPr id="14" name="Rounded Rectangle 13"/>
           <p:cNvSpPr/>
           <p:nvPr/>
         </p:nvSpPr>
         <p:spPr>
           <a:xfrm>
-            <a:off x="6309360" y="1737360"/>
-            <a:ext cx="5120640" cy="4206240"/>
-          </a:xfrm>
-          <a:prstGeom prst="rect">
+            <a:off x="6400800" y="1645920"/>
+            <a:ext cx="5029200" cy="4480560"/>
+          </a:xfrm>
+          <a:prstGeom prst="roundRect">
             <a:avLst/>
           </a:prstGeom>
           <a:solidFill>
@@ -4319,13 +4664,13 @@
       </p:sp>
       <p:sp>
         <p:nvSpPr>
-          <p:cNvPr id="10" name="TextBox 9"/>
-          <p:cNvSpPr txBox="1"/>
-          <p:nvPr/>
-        </p:nvSpPr>
-        <p:spPr>
-          <a:xfrm>
-            <a:off x="6583680" y="1920240"/>
+          <p:cNvPr id="15" name="TextBox 14"/>
+          <p:cNvSpPr txBox="1"/>
+          <p:nvPr/>
+        </p:nvSpPr>
+        <p:spPr>
+          <a:xfrm>
+            <a:off x="6675120" y="1828800"/>
             <a:ext cx="4572000" cy="457200"/>
           </a:xfrm>
           <a:prstGeom prst="rect">
@@ -4334,7 +4679,7 @@
           <a:noFill/>
         </p:spPr>
         <p:txBody>
-          <a:bodyPr wrap="square" anchor="t">
+          <a:bodyPr wrap="square">
             <a:spAutoFit/>
           </a:bodyPr>
           <a:lstStyle/>
@@ -4348,49 +4693,190 @@
                 <a:latin typeface="Microsoft YaHei"/>
                 <a:ea typeface="Microsoft YaHei"/>
               </a:rPr>
-              <a:t>Bearer 认证</a:t>
-            </a:r>
-          </a:p>
-        </p:txBody>
-      </p:sp>
-      <p:sp>
-        <p:nvSpPr>
-          <p:cNvPr id="11" name="TextBox 10"/>
-          <p:cNvSpPr txBox="1"/>
-          <p:nvPr/>
-        </p:nvSpPr>
-        <p:spPr>
-          <a:xfrm>
-            <a:off x="6583680" y="2468880"/>
-            <a:ext cx="4572000" cy="3474720"/>
-          </a:xfrm>
-          <a:prstGeom prst="rect">
-            <a:avLst/>
-          </a:prstGeom>
-          <a:noFill/>
-        </p:spPr>
-        <p:txBody>
-          <a:bodyPr wrap="square" anchor="t">
-            <a:spAutoFit/>
-          </a:bodyPr>
-          <a:lstStyle/>
-          <a:p>
-            <a:pPr algn="l"/>
-            <a:r>
-              <a:rPr sz="1400" b="0">
+              <a:t>users Bearer 认证</a:t>
+            </a:r>
+          </a:p>
+        </p:txBody>
+      </p:sp>
+      <p:sp>
+        <p:nvSpPr>
+          <p:cNvPr id="16" name="TextBox 15"/>
+          <p:cNvSpPr txBox="1"/>
+          <p:nvPr/>
+        </p:nvSpPr>
+        <p:spPr>
+          <a:xfrm>
+            <a:off x="6675120" y="2331720"/>
+            <a:ext cx="4572000" cy="914400"/>
+          </a:xfrm>
+          <a:prstGeom prst="rect">
+            <a:avLst/>
+          </a:prstGeom>
+          <a:noFill/>
+        </p:spPr>
+        <p:txBody>
+          <a:bodyPr wrap="square">
+            <a:spAutoFit/>
+          </a:bodyPr>
+          <a:lstStyle/>
+          <a:p>
+            <a:pPr algn="l"/>
+            <a:r>
+              <a:rPr sz="1300" b="0">
                 <a:solidFill>
                   <a:srgbClr val="D6E4F5"/>
+                </a:solidFill>
+                <a:latin typeface="Microsoft YaHei"/>
+                <a:ea typeface="Microsoft YaHei"/>
+              </a:rPr>
+              <a:t>bcrypt.hashpw 哈希密码，绝不存明文
+secrets.token_urlsafe 签发随机会话 token</a:t>
+            </a:r>
+          </a:p>
+        </p:txBody>
+      </p:sp>
+      <p:sp>
+        <p:nvSpPr>
+          <p:cNvPr id="17" name="TextBox 16"/>
+          <p:cNvSpPr txBox="1"/>
+          <p:nvPr/>
+        </p:nvSpPr>
+        <p:spPr>
+          <a:xfrm>
+            <a:off x="6675120" y="3383280"/>
+            <a:ext cx="4572000" cy="457200"/>
+          </a:xfrm>
+          <a:prstGeom prst="rect">
+            <a:avLst/>
+          </a:prstGeom>
+          <a:noFill/>
+        </p:spPr>
+        <p:txBody>
+          <a:bodyPr wrap="square">
+            <a:spAutoFit/>
+          </a:bodyPr>
+          <a:lstStyle/>
+          <a:p>
+            <a:pPr algn="l"/>
+            <a:r>
+              <a:rPr sz="1800" b="1">
+                <a:solidFill>
+                  <a:srgbClr val="4FC3F7"/>
                 </a:solidFill>
                 <a:latin typeface="Consolas"/>
                 <a:ea typeface="Consolas"/>
               </a:rPr>
-              <a:t>注册 / 登录
-  bcrypt 密码哈希
-  随机 token 会话
-get_current_user
-  解析 Bearer token
-  → 返回 user_id
-所有会话按 user_id 隔离</a:t>
+              <a:t>get_current_user</a:t>
+            </a:r>
+          </a:p>
+        </p:txBody>
+      </p:sp>
+      <p:sp>
+        <p:nvSpPr>
+          <p:cNvPr id="18" name="TextBox 17"/>
+          <p:cNvSpPr txBox="1"/>
+          <p:nvPr/>
+        </p:nvSpPr>
+        <p:spPr>
+          <a:xfrm>
+            <a:off x="6675120" y="3840480"/>
+            <a:ext cx="4572000" cy="914400"/>
+          </a:xfrm>
+          <a:prstGeom prst="rect">
+            <a:avLst/>
+          </a:prstGeom>
+          <a:noFill/>
+        </p:spPr>
+        <p:txBody>
+          <a:bodyPr wrap="square">
+            <a:spAutoFit/>
+          </a:bodyPr>
+          <a:lstStyle/>
+          <a:p>
+            <a:pPr algn="l"/>
+            <a:r>
+              <a:rPr sz="1300" b="0">
+                <a:solidFill>
+                  <a:srgbClr val="D6E4F5"/>
+                </a:solidFill>
+                <a:latin typeface="Microsoft YaHei"/>
+                <a:ea typeface="Microsoft YaHei"/>
+              </a:rPr>
+              <a:t>解析 Authorization: Bearer token → 查会话 → 返回 user_id
+缺失/非法 → 401</a:t>
+            </a:r>
+          </a:p>
+        </p:txBody>
+      </p:sp>
+      <p:sp>
+        <p:nvSpPr>
+          <p:cNvPr id="19" name="TextBox 18"/>
+          <p:cNvSpPr txBox="1"/>
+          <p:nvPr/>
+        </p:nvSpPr>
+        <p:spPr>
+          <a:xfrm>
+            <a:off x="6675120" y="4937760"/>
+            <a:ext cx="4572000" cy="457200"/>
+          </a:xfrm>
+          <a:prstGeom prst="rect">
+            <a:avLst/>
+          </a:prstGeom>
+          <a:noFill/>
+        </p:spPr>
+        <p:txBody>
+          <a:bodyPr wrap="square">
+            <a:spAutoFit/>
+          </a:bodyPr>
+          <a:lstStyle/>
+          <a:p>
+            <a:pPr algn="l"/>
+            <a:r>
+              <a:rPr sz="1800" b="1">
+                <a:solidFill>
+                  <a:srgbClr val="FFB74D"/>
+                </a:solidFill>
+                <a:latin typeface="Microsoft YaHei"/>
+                <a:ea typeface="Microsoft YaHei"/>
+              </a:rPr>
+              <a:t>设计取舍</a:t>
+            </a:r>
+          </a:p>
+        </p:txBody>
+      </p:sp>
+      <p:sp>
+        <p:nvSpPr>
+          <p:cNvPr id="20" name="TextBox 19"/>
+          <p:cNvSpPr txBox="1"/>
+          <p:nvPr/>
+        </p:nvSpPr>
+        <p:spPr>
+          <a:xfrm>
+            <a:off x="6675120" y="5394960"/>
+            <a:ext cx="4572000" cy="731520"/>
+          </a:xfrm>
+          <a:prstGeom prst="rect">
+            <a:avLst/>
+          </a:prstGeom>
+          <a:noFill/>
+        </p:spPr>
+        <p:txBody>
+          <a:bodyPr wrap="square">
+            <a:spAutoFit/>
+          </a:bodyPr>
+          <a:lstStyle/>
+          <a:p>
+            <a:pPr algn="l"/>
+            <a:r>
+              <a:rPr sz="1300" b="0">
+                <a:solidFill>
+                  <a:srgbClr val="8FB0D4"/>
+                </a:solidFill>
+                <a:latin typeface="Microsoft YaHei"/>
+                <a:ea typeface="Microsoft YaHei"/>
+              </a:rPr>
+              <a:t>PRD 原定匿名 X-Client-Id，演进为注册登录
+以 user_id 替代 client_id 做归属隔离</a:t>
             </a:r>
           </a:p>
         </p:txBody>
@@ -4474,7 +4960,7 @@
           <a:noFill/>
         </p:spPr>
         <p:txBody>
-          <a:bodyPr wrap="square" anchor="t">
+          <a:bodyPr wrap="square">
             <a:spAutoFit/>
           </a:bodyPr>
           <a:lstStyle/>
@@ -4554,7 +5040,7 @@
           <a:noFill/>
         </p:spPr>
         <p:txBody>
-          <a:bodyPr wrap="square" anchor="t">
+          <a:bodyPr wrap="square">
             <a:spAutoFit/>
           </a:bodyPr>
           <a:lstStyle/>
@@ -4575,22 +5061,68 @@
       </p:sp>
       <p:sp>
         <p:nvSpPr>
-          <p:cNvPr id="6" name="TextBox 5"/>
-          <p:cNvSpPr txBox="1"/>
-          <p:nvPr/>
-        </p:nvSpPr>
-        <p:spPr>
-          <a:xfrm>
-            <a:off x="822960" y="1737360"/>
-            <a:ext cx="1645920" cy="457200"/>
-          </a:xfrm>
-          <a:prstGeom prst="rect">
-            <a:avLst/>
-          </a:prstGeom>
-          <a:noFill/>
-        </p:spPr>
-        <p:txBody>
-          <a:bodyPr wrap="square" anchor="t">
+          <p:cNvPr id="6" name="Rounded Rectangle 5"/>
+          <p:cNvSpPr/>
+          <p:nvPr/>
+        </p:nvSpPr>
+        <p:spPr>
+          <a:xfrm>
+            <a:off x="822960" y="1645920"/>
+            <a:ext cx="4846320" cy="1371600"/>
+          </a:xfrm>
+          <a:prstGeom prst="roundRect">
+            <a:avLst/>
+          </a:prstGeom>
+          <a:solidFill>
+            <a:srgbClr val="11294A"/>
+          </a:solidFill>
+          <a:ln w="19050">
+            <a:solidFill>
+              <a:srgbClr val="FFB74D"/>
+            </a:solidFill>
+          </a:ln>
+          <a:effectLst/>
+        </p:spPr>
+        <p:style>
+          <a:lnRef idx="1">
+            <a:schemeClr val="accent1"/>
+          </a:lnRef>
+          <a:fillRef idx="3">
+            <a:schemeClr val="accent1"/>
+          </a:fillRef>
+          <a:effectRef idx="2">
+            <a:schemeClr val="accent1"/>
+          </a:effectRef>
+          <a:fontRef idx="minor">
+            <a:schemeClr val="lt1"/>
+          </a:fontRef>
+        </p:style>
+        <p:txBody>
+          <a:bodyPr rtlCol="0" anchor="ctr"/>
+          <a:lstStyle/>
+          <a:p>
+            <a:pPr algn="ctr"/>
+          </a:p>
+        </p:txBody>
+      </p:sp>
+      <p:sp>
+        <p:nvSpPr>
+          <p:cNvPr id="7" name="TextBox 6"/>
+          <p:cNvSpPr txBox="1"/>
+          <p:nvPr/>
+        </p:nvSpPr>
+        <p:spPr>
+          <a:xfrm>
+            <a:off x="1005840" y="1783080"/>
+            <a:ext cx="4572000" cy="365760"/>
+          </a:xfrm>
+          <a:prstGeom prst="rect">
+            <a:avLst/>
+          </a:prstGeom>
+          <a:noFill/>
+        </p:spPr>
+        <p:txBody>
+          <a:bodyPr wrap="square">
             <a:spAutoFit/>
           </a:bodyPr>
           <a:lstStyle/>
@@ -4604,209 +5136,347 @@
                 <a:latin typeface="Microsoft YaHei"/>
                 <a:ea typeface="Microsoft YaHei"/>
               </a:rPr>
-              <a:t>问题 1</a:t>
-            </a:r>
-          </a:p>
-        </p:txBody>
-      </p:sp>
-      <p:sp>
-        <p:nvSpPr>
-          <p:cNvPr id="7" name="TextBox 6"/>
-          <p:cNvSpPr txBox="1"/>
-          <p:nvPr/>
-        </p:nvSpPr>
-        <p:spPr>
-          <a:xfrm>
-            <a:off x="822960" y="2194560"/>
-            <a:ext cx="10058400" cy="365760"/>
-          </a:xfrm>
-          <a:prstGeom prst="rect">
-            <a:avLst/>
-          </a:prstGeom>
-          <a:noFill/>
-        </p:spPr>
-        <p:txBody>
-          <a:bodyPr wrap="square" anchor="t">
-            <a:spAutoFit/>
-          </a:bodyPr>
-          <a:lstStyle/>
-          <a:p>
-            <a:pPr algn="l"/>
-            <a:r>
-              <a:rPr sz="1600" b="0">
+              <a:t>问题 1 · 匿名标识 vs 注册登录</a:t>
+            </a:r>
+          </a:p>
+        </p:txBody>
+      </p:sp>
+      <p:sp>
+        <p:nvSpPr>
+          <p:cNvPr id="8" name="TextBox 7"/>
+          <p:cNvSpPr txBox="1"/>
+          <p:nvPr/>
+        </p:nvSpPr>
+        <p:spPr>
+          <a:xfrm>
+            <a:off x="1005840" y="2194560"/>
+            <a:ext cx="4572000" cy="731520"/>
+          </a:xfrm>
+          <a:prstGeom prst="rect">
+            <a:avLst/>
+          </a:prstGeom>
+          <a:noFill/>
+        </p:spPr>
+        <p:txBody>
+          <a:bodyPr wrap="square">
+            <a:spAutoFit/>
+          </a:bodyPr>
+          <a:lstStyle/>
+          <a:p>
+            <a:pPr algn="l"/>
+            <a:r>
+              <a:rPr sz="1300" b="0">
                 <a:solidFill>
                   <a:srgbClr val="D6E4F5"/>
                 </a:solidFill>
                 <a:latin typeface="Microsoft YaHei"/>
                 <a:ea typeface="Microsoft YaHei"/>
               </a:rPr>
-              <a:t>PRD 原定匿名 X-Client-Id</a:t>
-            </a:r>
-          </a:p>
-        </p:txBody>
-      </p:sp>
-      <p:sp>
-        <p:nvSpPr>
-          <p:cNvPr id="8" name="TextBox 7"/>
-          <p:cNvSpPr txBox="1"/>
-          <p:nvPr/>
-        </p:nvSpPr>
-        <p:spPr>
-          <a:xfrm>
-            <a:off x="822960" y="2651760"/>
-            <a:ext cx="10058400" cy="457200"/>
-          </a:xfrm>
-          <a:prstGeom prst="rect">
-            <a:avLst/>
-          </a:prstGeom>
-          <a:noFill/>
-        </p:spPr>
-        <p:txBody>
-          <a:bodyPr wrap="square" anchor="t">
-            <a:spAutoFit/>
-          </a:bodyPr>
-          <a:lstStyle/>
-          <a:p>
-            <a:pPr algn="l"/>
-            <a:r>
-              <a:rPr sz="1500" b="0">
+              <a:t>PRD 6.4 原定匿名 X-Client-Id，实现时演进为注册登录，计划书与代码产生分歧</a:t>
+            </a:r>
+          </a:p>
+        </p:txBody>
+      </p:sp>
+      <p:sp>
+        <p:nvSpPr>
+          <p:cNvPr id="9" name="Rounded Rectangle 8"/>
+          <p:cNvSpPr/>
+          <p:nvPr/>
+        </p:nvSpPr>
+        <p:spPr>
+          <a:xfrm>
+            <a:off x="6035040" y="1645920"/>
+            <a:ext cx="5394960" cy="1371600"/>
+          </a:xfrm>
+          <a:prstGeom prst="roundRect">
+            <a:avLst/>
+          </a:prstGeom>
+          <a:solidFill>
+            <a:srgbClr val="11294A"/>
+          </a:solidFill>
+          <a:ln w="19050">
+            <a:solidFill>
+              <a:srgbClr val="4FC3F7"/>
+            </a:solidFill>
+          </a:ln>
+          <a:effectLst/>
+        </p:spPr>
+        <p:style>
+          <a:lnRef idx="1">
+            <a:schemeClr val="accent1"/>
+          </a:lnRef>
+          <a:fillRef idx="3">
+            <a:schemeClr val="accent1"/>
+          </a:fillRef>
+          <a:effectRef idx="2">
+            <a:schemeClr val="accent1"/>
+          </a:effectRef>
+          <a:fontRef idx="minor">
+            <a:schemeClr val="lt1"/>
+          </a:fontRef>
+        </p:style>
+        <p:txBody>
+          <a:bodyPr rtlCol="0" anchor="ctr"/>
+          <a:lstStyle/>
+          <a:p>
+            <a:pPr algn="ctr"/>
+          </a:p>
+        </p:txBody>
+      </p:sp>
+      <p:sp>
+        <p:nvSpPr>
+          <p:cNvPr id="10" name="TextBox 9"/>
+          <p:cNvSpPr txBox="1"/>
+          <p:nvPr/>
+        </p:nvSpPr>
+        <p:spPr>
+          <a:xfrm>
+            <a:off x="6217920" y="1783080"/>
+            <a:ext cx="5029200" cy="365760"/>
+          </a:xfrm>
+          <a:prstGeom prst="rect">
+            <a:avLst/>
+          </a:prstGeom>
+          <a:noFill/>
+        </p:spPr>
+        <p:txBody>
+          <a:bodyPr wrap="square">
+            <a:spAutoFit/>
+          </a:bodyPr>
+          <a:lstStyle/>
+          <a:p>
+            <a:pPr algn="l"/>
+            <a:r>
+              <a:rPr sz="1600" b="1">
                 <a:solidFill>
                   <a:srgbClr val="4FC3F7"/>
                 </a:solidFill>
                 <a:latin typeface="Microsoft YaHei"/>
                 <a:ea typeface="Microsoft YaHei"/>
               </a:rPr>
-              <a:t>→ 以 Bearer token 的 user_id 替代 client_id 做归属隔离</a:t>
-            </a:r>
-          </a:p>
-        </p:txBody>
-      </p:sp>
-      <p:sp>
-        <p:nvSpPr>
-          <p:cNvPr id="9" name="TextBox 8"/>
-          <p:cNvSpPr txBox="1"/>
-          <p:nvPr/>
-        </p:nvSpPr>
-        <p:spPr>
-          <a:xfrm>
-            <a:off x="822960" y="3200400"/>
-            <a:ext cx="1645920" cy="457200"/>
-          </a:xfrm>
-          <a:prstGeom prst="rect">
-            <a:avLst/>
-          </a:prstGeom>
-          <a:noFill/>
-        </p:spPr>
-        <p:txBody>
-          <a:bodyPr wrap="square" anchor="t">
-            <a:spAutoFit/>
-          </a:bodyPr>
-          <a:lstStyle/>
-          <a:p>
-            <a:pPr algn="l"/>
-            <a:r>
-              <a:rPr sz="1600" b="1">
-                <a:solidFill>
-                  <a:srgbClr val="FFB74D"/>
+              <a:t>解决 · user_id 归属隔离</a:t>
+            </a:r>
+          </a:p>
+        </p:txBody>
+      </p:sp>
+      <p:sp>
+        <p:nvSpPr>
+          <p:cNvPr id="11" name="TextBox 10"/>
+          <p:cNvSpPr txBox="1"/>
+          <p:nvPr/>
+        </p:nvSpPr>
+        <p:spPr>
+          <a:xfrm>
+            <a:off x="6217920" y="2194560"/>
+            <a:ext cx="5029200" cy="731520"/>
+          </a:xfrm>
+          <a:prstGeom prst="rect">
+            <a:avLst/>
+          </a:prstGeom>
+          <a:noFill/>
+        </p:spPr>
+        <p:txBody>
+          <a:bodyPr wrap="square">
+            <a:spAutoFit/>
+          </a:bodyPr>
+          <a:lstStyle/>
+          <a:p>
+            <a:pPr algn="l"/>
+            <a:r>
+              <a:rPr sz="1300" b="0">
+                <a:solidFill>
+                  <a:srgbClr val="D6E4F5"/>
                 </a:solidFill>
                 <a:latin typeface="Microsoft YaHei"/>
                 <a:ea typeface="Microsoft YaHei"/>
               </a:rPr>
-              <a:t>问题 2</a:t>
-            </a:r>
-          </a:p>
-        </p:txBody>
-      </p:sp>
-      <p:sp>
-        <p:nvSpPr>
-          <p:cNvPr id="10" name="TextBox 9"/>
-          <p:cNvSpPr txBox="1"/>
-          <p:nvPr/>
-        </p:nvSpPr>
-        <p:spPr>
-          <a:xfrm>
-            <a:off x="822960" y="3657600"/>
-            <a:ext cx="10058400" cy="365760"/>
-          </a:xfrm>
-          <a:prstGeom prst="rect">
-            <a:avLst/>
-          </a:prstGeom>
-          <a:noFill/>
-        </p:spPr>
-        <p:txBody>
-          <a:bodyPr wrap="square" anchor="t">
-            <a:spAutoFit/>
-          </a:bodyPr>
-          <a:lstStyle/>
-          <a:p>
-            <a:pPr algn="l"/>
-            <a:r>
-              <a:rPr sz="1600" b="0">
-                <a:solidFill>
-                  <a:srgbClr val="D6E4F5"/>
+              <a:t>以 Bearer token 解析出的 user_id 替代 client_id，会话/报告按 user_id 严格隔离，跨用户返回 403</a:t>
+            </a:r>
+          </a:p>
+        </p:txBody>
+      </p:sp>
+      <p:sp>
+        <p:nvSpPr>
+          <p:cNvPr id="12" name="Rounded Rectangle 11"/>
+          <p:cNvSpPr/>
+          <p:nvPr/>
+        </p:nvSpPr>
+        <p:spPr>
+          <a:xfrm>
+            <a:off x="822960" y="3246120"/>
+            <a:ext cx="4846320" cy="1371600"/>
+          </a:xfrm>
+          <a:prstGeom prst="roundRect">
+            <a:avLst/>
+          </a:prstGeom>
+          <a:solidFill>
+            <a:srgbClr val="11294A"/>
+          </a:solidFill>
+          <a:ln w="19050">
+            <a:solidFill>
+              <a:srgbClr val="FFB74D"/>
+            </a:solidFill>
+          </a:ln>
+          <a:effectLst/>
+        </p:spPr>
+        <p:style>
+          <a:lnRef idx="1">
+            <a:schemeClr val="accent1"/>
+          </a:lnRef>
+          <a:fillRef idx="3">
+            <a:schemeClr val="accent1"/>
+          </a:fillRef>
+          <a:effectRef idx="2">
+            <a:schemeClr val="accent1"/>
+          </a:effectRef>
+          <a:fontRef idx="minor">
+            <a:schemeClr val="lt1"/>
+          </a:fontRef>
+        </p:style>
+        <p:txBody>
+          <a:bodyPr rtlCol="0" anchor="ctr"/>
+          <a:lstStyle/>
+          <a:p>
+            <a:pPr algn="ctr"/>
+          </a:p>
+        </p:txBody>
+      </p:sp>
+      <p:sp>
+        <p:nvSpPr>
+          <p:cNvPr id="13" name="TextBox 12"/>
+          <p:cNvSpPr txBox="1"/>
+          <p:nvPr/>
+        </p:nvSpPr>
+        <p:spPr>
+          <a:xfrm>
+            <a:off x="1005840" y="3383279"/>
+            <a:ext cx="4572000" cy="365760"/>
+          </a:xfrm>
+          <a:prstGeom prst="rect">
+            <a:avLst/>
+          </a:prstGeom>
+          <a:noFill/>
+        </p:spPr>
+        <p:txBody>
+          <a:bodyPr wrap="square">
+            <a:spAutoFit/>
+          </a:bodyPr>
+          <a:lstStyle/>
+          <a:p>
+            <a:pPr algn="l"/>
+            <a:r>
+              <a:rPr sz="1600" b="1">
+                <a:solidFill>
+                  <a:srgbClr val="FFB74D"/>
                 </a:solidFill>
                 <a:latin typeface="Microsoft YaHei"/>
                 <a:ea typeface="Microsoft YaHei"/>
               </a:rPr>
-              <a:t>interviews 与 reports 反向依赖</a:t>
-            </a:r>
-          </a:p>
-        </p:txBody>
-      </p:sp>
-      <p:sp>
-        <p:nvSpPr>
-          <p:cNvPr id="11" name="TextBox 10"/>
-          <p:cNvSpPr txBox="1"/>
-          <p:nvPr/>
-        </p:nvSpPr>
-        <p:spPr>
-          <a:xfrm>
-            <a:off x="822960" y="4114800"/>
-            <a:ext cx="10058400" cy="457200"/>
-          </a:xfrm>
-          <a:prstGeom prst="rect">
-            <a:avLst/>
-          </a:prstGeom>
-          <a:noFill/>
-        </p:spPr>
-        <p:txBody>
-          <a:bodyPr wrap="square" anchor="t">
-            <a:spAutoFit/>
-          </a:bodyPr>
-          <a:lstStyle/>
-          <a:p>
-            <a:pPr algn="l"/>
-            <a:r>
-              <a:rPr sz="1500" b="0">
-                <a:solidFill>
-                  <a:srgbClr val="4FC3F7"/>
+              <a:t>问题 2 · 报告生成时序</a:t>
+            </a:r>
+          </a:p>
+        </p:txBody>
+      </p:sp>
+      <p:sp>
+        <p:nvSpPr>
+          <p:cNvPr id="14" name="TextBox 13"/>
+          <p:cNvSpPr txBox="1"/>
+          <p:nvPr/>
+        </p:nvSpPr>
+        <p:spPr>
+          <a:xfrm>
+            <a:off x="1005840" y="3794759"/>
+            <a:ext cx="4572000" cy="731520"/>
+          </a:xfrm>
+          <a:prstGeom prst="rect">
+            <a:avLst/>
+          </a:prstGeom>
+          <a:noFill/>
+        </p:spPr>
+        <p:txBody>
+          <a:bodyPr wrap="square">
+            <a:spAutoFit/>
+          </a:bodyPr>
+          <a:lstStyle/>
+          <a:p>
+            <a:pPr algn="l"/>
+            <a:r>
+              <a:rPr sz="1300" b="0">
+                <a:solidFill>
+                  <a:srgbClr val="D6E4F5"/>
                 </a:solidFill>
                 <a:latin typeface="Microsoft YaHei"/>
                 <a:ea typeface="Microsoft YaHei"/>
               </a:rPr>
-              <a:t>→ 报告改为查询时惰性生成，避免反向依赖</a:t>
-            </a:r>
-          </a:p>
-        </p:txBody>
-      </p:sp>
-      <p:sp>
-        <p:nvSpPr>
-          <p:cNvPr id="12" name="TextBox 11"/>
-          <p:cNvSpPr txBox="1"/>
-          <p:nvPr/>
-        </p:nvSpPr>
-        <p:spPr>
-          <a:xfrm>
-            <a:off x="822960" y="4663440"/>
-            <a:ext cx="1645920" cy="457200"/>
-          </a:xfrm>
-          <a:prstGeom prst="rect">
-            <a:avLst/>
-          </a:prstGeom>
-          <a:noFill/>
-        </p:spPr>
-        <p:txBody>
-          <a:bodyPr wrap="square" anchor="t">
+              <a:t>会话结束时同步生成报告会造成 interviews → reports 反向依赖</a:t>
+            </a:r>
+          </a:p>
+        </p:txBody>
+      </p:sp>
+      <p:sp>
+        <p:nvSpPr>
+          <p:cNvPr id="15" name="Rounded Rectangle 14"/>
+          <p:cNvSpPr/>
+          <p:nvPr/>
+        </p:nvSpPr>
+        <p:spPr>
+          <a:xfrm>
+            <a:off x="6035040" y="3246120"/>
+            <a:ext cx="5394960" cy="1371600"/>
+          </a:xfrm>
+          <a:prstGeom prst="roundRect">
+            <a:avLst/>
+          </a:prstGeom>
+          <a:solidFill>
+            <a:srgbClr val="11294A"/>
+          </a:solidFill>
+          <a:ln w="19050">
+            <a:solidFill>
+              <a:srgbClr val="4FC3F7"/>
+            </a:solidFill>
+          </a:ln>
+          <a:effectLst/>
+        </p:spPr>
+        <p:style>
+          <a:lnRef idx="1">
+            <a:schemeClr val="accent1"/>
+          </a:lnRef>
+          <a:fillRef idx="3">
+            <a:schemeClr val="accent1"/>
+          </a:fillRef>
+          <a:effectRef idx="2">
+            <a:schemeClr val="accent1"/>
+          </a:effectRef>
+          <a:fontRef idx="minor">
+            <a:schemeClr val="lt1"/>
+          </a:fontRef>
+        </p:style>
+        <p:txBody>
+          <a:bodyPr rtlCol="0" anchor="ctr"/>
+          <a:lstStyle/>
+          <a:p>
+            <a:pPr algn="ctr"/>
+          </a:p>
+        </p:txBody>
+      </p:sp>
+      <p:sp>
+        <p:nvSpPr>
+          <p:cNvPr id="16" name="TextBox 15"/>
+          <p:cNvSpPr txBox="1"/>
+          <p:nvPr/>
+        </p:nvSpPr>
+        <p:spPr>
+          <a:xfrm>
+            <a:off x="6217920" y="3383279"/>
+            <a:ext cx="5029200" cy="365760"/>
+          </a:xfrm>
+          <a:prstGeom prst="rect">
+            <a:avLst/>
+          </a:prstGeom>
+          <a:noFill/>
+        </p:spPr>
+        <p:txBody>
+          <a:bodyPr wrap="square">
             <a:spAutoFit/>
           </a:bodyPr>
           <a:lstStyle/>
@@ -4815,84 +5485,284 @@
             <a:r>
               <a:rPr sz="1600" b="1">
                 <a:solidFill>
-                  <a:srgbClr val="FFB74D"/>
+                  <a:srgbClr val="4FC3F7"/>
                 </a:solidFill>
                 <a:latin typeface="Microsoft YaHei"/>
                 <a:ea typeface="Microsoft YaHei"/>
               </a:rPr>
-              <a:t>问题 3</a:t>
-            </a:r>
-          </a:p>
-        </p:txBody>
-      </p:sp>
-      <p:sp>
-        <p:nvSpPr>
-          <p:cNvPr id="13" name="TextBox 12"/>
-          <p:cNvSpPr txBox="1"/>
-          <p:nvPr/>
-        </p:nvSpPr>
-        <p:spPr>
-          <a:xfrm>
-            <a:off x="822960" y="5120640"/>
-            <a:ext cx="10058400" cy="365760"/>
-          </a:xfrm>
-          <a:prstGeom prst="rect">
-            <a:avLst/>
-          </a:prstGeom>
-          <a:noFill/>
-        </p:spPr>
-        <p:txBody>
-          <a:bodyPr wrap="square" anchor="t">
-            <a:spAutoFit/>
-          </a:bodyPr>
-          <a:lstStyle/>
-          <a:p>
-            <a:pPr algn="l"/>
-            <a:r>
-              <a:rPr sz="1600" b="0">
+              <a:t>解决 · 查询时惰性生成</a:t>
+            </a:r>
+          </a:p>
+        </p:txBody>
+      </p:sp>
+      <p:sp>
+        <p:nvSpPr>
+          <p:cNvPr id="17" name="TextBox 16"/>
+          <p:cNvSpPr txBox="1"/>
+          <p:nvPr/>
+        </p:nvSpPr>
+        <p:spPr>
+          <a:xfrm>
+            <a:off x="6217920" y="3794759"/>
+            <a:ext cx="5029200" cy="731520"/>
+          </a:xfrm>
+          <a:prstGeom prst="rect">
+            <a:avLst/>
+          </a:prstGeom>
+          <a:noFill/>
+        </p:spPr>
+        <p:txBody>
+          <a:bodyPr wrap="square">
+            <a:spAutoFit/>
+          </a:bodyPr>
+          <a:lstStyle/>
+          <a:p>
+            <a:pPr algn="l"/>
+            <a:r>
+              <a:rPr sz="1300" b="0">
                 <a:solidFill>
                   <a:srgbClr val="D6E4F5"/>
                 </a:solidFill>
                 <a:latin typeface="Microsoft YaHei"/>
                 <a:ea typeface="Microsoft YaHei"/>
               </a:rPr>
-              <a:t>前后端分离跨源失败</a:t>
-            </a:r>
-          </a:p>
-        </p:txBody>
-      </p:sp>
-      <p:sp>
-        <p:nvSpPr>
-          <p:cNvPr id="14" name="TextBox 13"/>
-          <p:cNvSpPr txBox="1"/>
-          <p:nvPr/>
-        </p:nvSpPr>
-        <p:spPr>
-          <a:xfrm>
-            <a:off x="822960" y="5577840"/>
-            <a:ext cx="10058400" cy="457200"/>
-          </a:xfrm>
-          <a:prstGeom prst="rect">
-            <a:avLst/>
-          </a:prstGeom>
-          <a:noFill/>
-        </p:spPr>
-        <p:txBody>
-          <a:bodyPr wrap="square" anchor="t">
-            <a:spAutoFit/>
-          </a:bodyPr>
-          <a:lstStyle/>
-          <a:p>
-            <a:pPr algn="l"/>
-            <a:r>
-              <a:rPr sz="1500" b="0">
-                <a:solidFill>
-                  <a:srgbClr val="4FC3F7"/>
+              <a:t>get_report 发现报告缺失才生成并落库，职责清晰、幂等（重复查询不重复生成）</a:t>
+            </a:r>
+          </a:p>
+        </p:txBody>
+      </p:sp>
+      <p:sp>
+        <p:nvSpPr>
+          <p:cNvPr id="18" name="Rounded Rectangle 17"/>
+          <p:cNvSpPr/>
+          <p:nvPr/>
+        </p:nvSpPr>
+        <p:spPr>
+          <a:xfrm>
+            <a:off x="822960" y="4846320"/>
+            <a:ext cx="4846320" cy="1371600"/>
+          </a:xfrm>
+          <a:prstGeom prst="roundRect">
+            <a:avLst/>
+          </a:prstGeom>
+          <a:solidFill>
+            <a:srgbClr val="11294A"/>
+          </a:solidFill>
+          <a:ln w="19050">
+            <a:solidFill>
+              <a:srgbClr val="FFB74D"/>
+            </a:solidFill>
+          </a:ln>
+          <a:effectLst/>
+        </p:spPr>
+        <p:style>
+          <a:lnRef idx="1">
+            <a:schemeClr val="accent1"/>
+          </a:lnRef>
+          <a:fillRef idx="3">
+            <a:schemeClr val="accent1"/>
+          </a:fillRef>
+          <a:effectRef idx="2">
+            <a:schemeClr val="accent1"/>
+          </a:effectRef>
+          <a:fontRef idx="minor">
+            <a:schemeClr val="lt1"/>
+          </a:fontRef>
+        </p:style>
+        <p:txBody>
+          <a:bodyPr rtlCol="0" anchor="ctr"/>
+          <a:lstStyle/>
+          <a:p>
+            <a:pPr algn="ctr"/>
+          </a:p>
+        </p:txBody>
+      </p:sp>
+      <p:sp>
+        <p:nvSpPr>
+          <p:cNvPr id="19" name="TextBox 18"/>
+          <p:cNvSpPr txBox="1"/>
+          <p:nvPr/>
+        </p:nvSpPr>
+        <p:spPr>
+          <a:xfrm>
+            <a:off x="1005840" y="4983480"/>
+            <a:ext cx="4572000" cy="365760"/>
+          </a:xfrm>
+          <a:prstGeom prst="rect">
+            <a:avLst/>
+          </a:prstGeom>
+          <a:noFill/>
+        </p:spPr>
+        <p:txBody>
+          <a:bodyPr wrap="square">
+            <a:spAutoFit/>
+          </a:bodyPr>
+          <a:lstStyle/>
+          <a:p>
+            <a:pPr algn="l"/>
+            <a:r>
+              <a:rPr sz="1600" b="1">
+                <a:solidFill>
+                  <a:srgbClr val="FFB74D"/>
                 </a:solidFill>
                 <a:latin typeface="Microsoft YaHei"/>
                 <a:ea typeface="Microsoft YaHei"/>
               </a:rPr>
-              <a:t>→ 后端托管前端静态文件，单服务同源联动 + CORS</a:t>
+              <a:t>问题 3 · 前后端跨源</a:t>
+            </a:r>
+          </a:p>
+        </p:txBody>
+      </p:sp>
+      <p:sp>
+        <p:nvSpPr>
+          <p:cNvPr id="20" name="TextBox 19"/>
+          <p:cNvSpPr txBox="1"/>
+          <p:nvPr/>
+        </p:nvSpPr>
+        <p:spPr>
+          <a:xfrm>
+            <a:off x="1005840" y="5394959"/>
+            <a:ext cx="4572000" cy="731520"/>
+          </a:xfrm>
+          <a:prstGeom prst="rect">
+            <a:avLst/>
+          </a:prstGeom>
+          <a:noFill/>
+        </p:spPr>
+        <p:txBody>
+          <a:bodyPr wrap="square">
+            <a:spAutoFit/>
+          </a:bodyPr>
+          <a:lstStyle/>
+          <a:p>
+            <a:pPr algn="l"/>
+            <a:r>
+              <a:rPr sz="1300" b="0">
+                <a:solidFill>
+                  <a:srgbClr val="D6E4F5"/>
+                </a:solidFill>
+                <a:latin typeface="Microsoft YaHei"/>
+                <a:ea typeface="Microsoft YaHei"/>
+              </a:rPr>
+              <a:t>前端 file:// 或跨端口访问被 CORS 拦截，前后端分离无法真正联动</a:t>
+            </a:r>
+          </a:p>
+        </p:txBody>
+      </p:sp>
+      <p:sp>
+        <p:nvSpPr>
+          <p:cNvPr id="21" name="Rounded Rectangle 20"/>
+          <p:cNvSpPr/>
+          <p:nvPr/>
+        </p:nvSpPr>
+        <p:spPr>
+          <a:xfrm>
+            <a:off x="6035040" y="4846320"/>
+            <a:ext cx="5394960" cy="1371600"/>
+          </a:xfrm>
+          <a:prstGeom prst="roundRect">
+            <a:avLst/>
+          </a:prstGeom>
+          <a:solidFill>
+            <a:srgbClr val="11294A"/>
+          </a:solidFill>
+          <a:ln w="19050">
+            <a:solidFill>
+              <a:srgbClr val="4FC3F7"/>
+            </a:solidFill>
+          </a:ln>
+          <a:effectLst/>
+        </p:spPr>
+        <p:style>
+          <a:lnRef idx="1">
+            <a:schemeClr val="accent1"/>
+          </a:lnRef>
+          <a:fillRef idx="3">
+            <a:schemeClr val="accent1"/>
+          </a:fillRef>
+          <a:effectRef idx="2">
+            <a:schemeClr val="accent1"/>
+          </a:effectRef>
+          <a:fontRef idx="minor">
+            <a:schemeClr val="lt1"/>
+          </a:fontRef>
+        </p:style>
+        <p:txBody>
+          <a:bodyPr rtlCol="0" anchor="ctr"/>
+          <a:lstStyle/>
+          <a:p>
+            <a:pPr algn="ctr"/>
+          </a:p>
+        </p:txBody>
+      </p:sp>
+      <p:sp>
+        <p:nvSpPr>
+          <p:cNvPr id="22" name="TextBox 21"/>
+          <p:cNvSpPr txBox="1"/>
+          <p:nvPr/>
+        </p:nvSpPr>
+        <p:spPr>
+          <a:xfrm>
+            <a:off x="6217920" y="4983480"/>
+            <a:ext cx="5029200" cy="365760"/>
+          </a:xfrm>
+          <a:prstGeom prst="rect">
+            <a:avLst/>
+          </a:prstGeom>
+          <a:noFill/>
+        </p:spPr>
+        <p:txBody>
+          <a:bodyPr wrap="square">
+            <a:spAutoFit/>
+          </a:bodyPr>
+          <a:lstStyle/>
+          <a:p>
+            <a:pPr algn="l"/>
+            <a:r>
+              <a:rPr sz="1600" b="1">
+                <a:solidFill>
+                  <a:srgbClr val="4FC3F7"/>
+                </a:solidFill>
+                <a:latin typeface="Microsoft YaHei"/>
+                <a:ea typeface="Microsoft YaHei"/>
+              </a:rPr>
+              <a:t>解决 · 单服务同源联动</a:t>
+            </a:r>
+          </a:p>
+        </p:txBody>
+      </p:sp>
+      <p:sp>
+        <p:nvSpPr>
+          <p:cNvPr id="23" name="TextBox 22"/>
+          <p:cNvSpPr txBox="1"/>
+          <p:nvPr/>
+        </p:nvSpPr>
+        <p:spPr>
+          <a:xfrm>
+            <a:off x="6217920" y="5394959"/>
+            <a:ext cx="5029200" cy="731520"/>
+          </a:xfrm>
+          <a:prstGeom prst="rect">
+            <a:avLst/>
+          </a:prstGeom>
+          <a:noFill/>
+        </p:spPr>
+        <p:txBody>
+          <a:bodyPr wrap="square">
+            <a:spAutoFit/>
+          </a:bodyPr>
+          <a:lstStyle/>
+          <a:p>
+            <a:pPr algn="l"/>
+            <a:r>
+              <a:rPr sz="1300" b="0">
+                <a:solidFill>
+                  <a:srgbClr val="D6E4F5"/>
+                </a:solidFill>
+                <a:latin typeface="Microsoft YaHei"/>
+                <a:ea typeface="Microsoft YaHei"/>
+              </a:rPr>
+              <a:t>后端挂载前端静态文件，/api 路由优先，单服务同源 + CORS 兜底，一条命令即可演示</a:t>
             </a:r>
           </a:p>
         </p:txBody>
@@ -4976,7 +5846,7 @@
           <a:noFill/>
         </p:spPr>
         <p:txBody>
-          <a:bodyPr wrap="square" anchor="t">
+          <a:bodyPr wrap="square">
             <a:spAutoFit/>
           </a:bodyPr>
           <a:lstStyle/>
@@ -5056,7 +5926,7 @@
           <a:noFill/>
         </p:spPr>
         <p:txBody>
-          <a:bodyPr wrap="square" anchor="t">
+          <a:bodyPr wrap="square">
             <a:spAutoFit/>
           </a:bodyPr>
           <a:lstStyle/>
@@ -5083,7 +5953,7 @@
         </p:nvSpPr>
         <p:spPr>
           <a:xfrm>
-            <a:off x="822960" y="1737360"/>
+            <a:off x="822960" y="1645920"/>
             <a:ext cx="731520" cy="548640"/>
           </a:xfrm>
           <a:prstGeom prst="rect">
@@ -5092,7 +5962,7 @@
           <a:noFill/>
         </p:spPr>
         <p:txBody>
-          <a:bodyPr wrap="square" anchor="t">
+          <a:bodyPr wrap="square">
             <a:spAutoFit/>
           </a:bodyPr>
           <a:lstStyle/>
@@ -5106,7 +5976,7 @@
                 <a:latin typeface="Consolas"/>
                 <a:ea typeface="Consolas"/>
               </a:rPr>
-              <a:t>1</a:t>
+              <a:t>01</a:t>
             </a:r>
           </a:p>
         </p:txBody>
@@ -5119,30 +5989,30 @@
         </p:nvSpPr>
         <p:spPr>
           <a:xfrm>
-            <a:off x="1645920" y="1828800"/>
-            <a:ext cx="9601200" cy="548640"/>
-          </a:xfrm>
-          <a:prstGeom prst="rect">
-            <a:avLst/>
-          </a:prstGeom>
-          <a:noFill/>
-        </p:spPr>
-        <p:txBody>
-          <a:bodyPr wrap="square" anchor="t">
-            <a:spAutoFit/>
-          </a:bodyPr>
-          <a:lstStyle/>
-          <a:p>
-            <a:pPr algn="l"/>
-            <a:r>
-              <a:rPr sz="2000" b="0">
+            <a:off x="1645920" y="1691640"/>
+            <a:ext cx="9601200" cy="457200"/>
+          </a:xfrm>
+          <a:prstGeom prst="rect">
+            <a:avLst/>
+          </a:prstGeom>
+          <a:noFill/>
+        </p:spPr>
+        <p:txBody>
+          <a:bodyPr wrap="square">
+            <a:spAutoFit/>
+          </a:bodyPr>
+          <a:lstStyle/>
+          <a:p>
+            <a:pPr algn="l"/>
+            <a:r>
+              <a:rPr sz="2000" b="1">
                 <a:solidFill>
                   <a:srgbClr val="D6E4F5"/>
                 </a:solidFill>
                 <a:latin typeface="Microsoft YaHei"/>
                 <a:ea typeface="Microsoft YaHei"/>
               </a:rPr>
-              <a:t>严格 TDD：先写失败测试再实现，76 用例全绿</a:t>
+              <a:t>严格 TDD 落地</a:t>
             </a:r>
           </a:p>
         </p:txBody>
@@ -5155,7 +6025,43 @@
         </p:nvSpPr>
         <p:spPr>
           <a:xfrm>
-            <a:off x="822960" y="2560320"/>
+            <a:off x="1645920" y="2148840"/>
+            <a:ext cx="9601200" cy="365760"/>
+          </a:xfrm>
+          <a:prstGeom prst="rect">
+            <a:avLst/>
+          </a:prstGeom>
+          <a:noFill/>
+        </p:spPr>
+        <p:txBody>
+          <a:bodyPr wrap="square">
+            <a:spAutoFit/>
+          </a:bodyPr>
+          <a:lstStyle/>
+          <a:p>
+            <a:pPr algn="l"/>
+            <a:r>
+              <a:rPr sz="1400" b="0">
+                <a:solidFill>
+                  <a:srgbClr val="8FB0D4"/>
+                </a:solidFill>
+                <a:latin typeface="Microsoft YaHei"/>
+                <a:ea typeface="Microsoft YaHei"/>
+              </a:rPr>
+              <a:t>先写失败测试再实现，76 个 pytest 用例全绿，覆盖服务层与 API 层</a:t>
+            </a:r>
+          </a:p>
+        </p:txBody>
+      </p:sp>
+      <p:sp>
+        <p:nvSpPr>
+          <p:cNvPr id="9" name="TextBox 8"/>
+          <p:cNvSpPr txBox="1"/>
+          <p:nvPr/>
+        </p:nvSpPr>
+        <p:spPr>
+          <a:xfrm>
+            <a:off x="822960" y="2606040"/>
             <a:ext cx="731520" cy="548640"/>
           </a:xfrm>
           <a:prstGeom prst="rect">
@@ -5164,7 +6070,7 @@
           <a:noFill/>
         </p:spPr>
         <p:txBody>
-          <a:bodyPr wrap="square" anchor="t">
+          <a:bodyPr wrap="square">
             <a:spAutoFit/>
           </a:bodyPr>
           <a:lstStyle/>
@@ -5178,56 +6084,92 @@
                 <a:latin typeface="Consolas"/>
                 <a:ea typeface="Consolas"/>
               </a:rPr>
-              <a:t>2</a:t>
-            </a:r>
-          </a:p>
-        </p:txBody>
-      </p:sp>
-      <p:sp>
-        <p:nvSpPr>
-          <p:cNvPr id="9" name="TextBox 8"/>
+              <a:t>02</a:t>
+            </a:r>
+          </a:p>
+        </p:txBody>
+      </p:sp>
+      <p:sp>
+        <p:nvSpPr>
+          <p:cNvPr id="10" name="TextBox 9"/>
           <p:cNvSpPr txBox="1"/>
           <p:nvPr/>
         </p:nvSpPr>
         <p:spPr>
           <a:xfrm>
             <a:off x="1645920" y="2651760"/>
-            <a:ext cx="9601200" cy="548640"/>
-          </a:xfrm>
-          <a:prstGeom prst="rect">
-            <a:avLst/>
-          </a:prstGeom>
-          <a:noFill/>
-        </p:spPr>
-        <p:txBody>
-          <a:bodyPr wrap="square" anchor="t">
-            <a:spAutoFit/>
-          </a:bodyPr>
-          <a:lstStyle/>
-          <a:p>
-            <a:pPr algn="l"/>
-            <a:r>
-              <a:rPr sz="2000" b="0">
+            <a:ext cx="9601200" cy="457200"/>
+          </a:xfrm>
+          <a:prstGeom prst="rect">
+            <a:avLst/>
+          </a:prstGeom>
+          <a:noFill/>
+        </p:spPr>
+        <p:txBody>
+          <a:bodyPr wrap="square">
+            <a:spAutoFit/>
+          </a:bodyPr>
+          <a:lstStyle/>
+          <a:p>
+            <a:pPr algn="l"/>
+            <a:r>
+              <a:rPr sz="2000" b="1">
                 <a:solidFill>
                   <a:srgbClr val="D6E4F5"/>
                 </a:solidFill>
                 <a:latin typeface="Microsoft YaHei"/>
                 <a:ea typeface="Microsoft YaHei"/>
               </a:rPr>
-              <a:t>分层架构：router / service / repository 职责清晰，每模块一包</a:t>
-            </a:r>
-          </a:p>
-        </p:txBody>
-      </p:sp>
-      <p:sp>
-        <p:nvSpPr>
-          <p:cNvPr id="10" name="TextBox 9"/>
-          <p:cNvSpPr txBox="1"/>
-          <p:nvPr/>
-        </p:nvSpPr>
-        <p:spPr>
-          <a:xfrm>
-            <a:off x="822960" y="3383280"/>
+              <a:t>严格分层架构</a:t>
+            </a:r>
+          </a:p>
+        </p:txBody>
+      </p:sp>
+      <p:sp>
+        <p:nvSpPr>
+          <p:cNvPr id="11" name="TextBox 10"/>
+          <p:cNvSpPr txBox="1"/>
+          <p:nvPr/>
+        </p:nvSpPr>
+        <p:spPr>
+          <a:xfrm>
+            <a:off x="1645920" y="3108960"/>
+            <a:ext cx="9601200" cy="365760"/>
+          </a:xfrm>
+          <a:prstGeom prst="rect">
+            <a:avLst/>
+          </a:prstGeom>
+          <a:noFill/>
+        </p:spPr>
+        <p:txBody>
+          <a:bodyPr wrap="square">
+            <a:spAutoFit/>
+          </a:bodyPr>
+          <a:lstStyle/>
+          <a:p>
+            <a:pPr algn="l"/>
+            <a:r>
+              <a:rPr sz="1400" b="0">
+                <a:solidFill>
+                  <a:srgbClr val="8FB0D4"/>
+                </a:solidFill>
+                <a:latin typeface="Microsoft YaHei"/>
+                <a:ea typeface="Microsoft YaHei"/>
+              </a:rPr>
+              <a:t>router → service → repository 职责清晰，7 个模块各一个包，依赖单向</a:t>
+            </a:r>
+          </a:p>
+        </p:txBody>
+      </p:sp>
+      <p:sp>
+        <p:nvSpPr>
+          <p:cNvPr id="12" name="TextBox 11"/>
+          <p:cNvSpPr txBox="1"/>
+          <p:nvPr/>
+        </p:nvSpPr>
+        <p:spPr>
+          <a:xfrm>
+            <a:off x="822960" y="3566160"/>
             <a:ext cx="731520" cy="548640"/>
           </a:xfrm>
           <a:prstGeom prst="rect">
@@ -5236,7 +6178,7 @@
           <a:noFill/>
         </p:spPr>
         <p:txBody>
-          <a:bodyPr wrap="square" anchor="t">
+          <a:bodyPr wrap="square">
             <a:spAutoFit/>
           </a:bodyPr>
           <a:lstStyle/>
@@ -5250,56 +6192,92 @@
                 <a:latin typeface="Consolas"/>
                 <a:ea typeface="Consolas"/>
               </a:rPr>
-              <a:t>3</a:t>
-            </a:r>
-          </a:p>
-        </p:txBody>
-      </p:sp>
-      <p:sp>
-        <p:nvSpPr>
-          <p:cNvPr id="11" name="TextBox 10"/>
-          <p:cNvSpPr txBox="1"/>
-          <p:nvPr/>
-        </p:nvSpPr>
-        <p:spPr>
-          <a:xfrm>
-            <a:off x="1645920" y="3474720"/>
-            <a:ext cx="9601200" cy="548640"/>
-          </a:xfrm>
-          <a:prstGeom prst="rect">
-            <a:avLst/>
-          </a:prstGeom>
-          <a:noFill/>
-        </p:spPr>
-        <p:txBody>
-          <a:bodyPr wrap="square" anchor="t">
-            <a:spAutoFit/>
-          </a:bodyPr>
-          <a:lstStyle/>
-          <a:p>
-            <a:pPr algn="l"/>
-            <a:r>
-              <a:rPr sz="2000" b="0">
+              <a:t>03</a:t>
+            </a:r>
+          </a:p>
+        </p:txBody>
+      </p:sp>
+      <p:sp>
+        <p:nvSpPr>
+          <p:cNvPr id="13" name="TextBox 12"/>
+          <p:cNvSpPr txBox="1"/>
+          <p:nvPr/>
+        </p:nvSpPr>
+        <p:spPr>
+          <a:xfrm>
+            <a:off x="1645920" y="3611880"/>
+            <a:ext cx="9601200" cy="457200"/>
+          </a:xfrm>
+          <a:prstGeom prst="rect">
+            <a:avLst/>
+          </a:prstGeom>
+          <a:noFill/>
+        </p:spPr>
+        <p:txBody>
+          <a:bodyPr wrap="square">
+            <a:spAutoFit/>
+          </a:bodyPr>
+          <a:lstStyle/>
+          <a:p>
+            <a:pPr algn="l"/>
+            <a:r>
+              <a:rPr sz="2000" b="1">
                 <a:solidFill>
                   <a:srgbClr val="D6E4F5"/>
                 </a:solidFill>
                 <a:latin typeface="Microsoft YaHei"/>
                 <a:ea typeface="Microsoft YaHei"/>
               </a:rPr>
-              <a:t>面向接口：engine 抽象可零改动替换真实大模型</a:t>
-            </a:r>
-          </a:p>
-        </p:txBody>
-      </p:sp>
-      <p:sp>
-        <p:nvSpPr>
-          <p:cNvPr id="12" name="TextBox 11"/>
-          <p:cNvSpPr txBox="1"/>
-          <p:nvPr/>
-        </p:nvSpPr>
-        <p:spPr>
-          <a:xfrm>
-            <a:off x="822960" y="4206240"/>
+              <a:t>面向接口设计</a:t>
+            </a:r>
+          </a:p>
+        </p:txBody>
+      </p:sp>
+      <p:sp>
+        <p:nvSpPr>
+          <p:cNvPr id="14" name="TextBox 13"/>
+          <p:cNvSpPr txBox="1"/>
+          <p:nvPr/>
+        </p:nvSpPr>
+        <p:spPr>
+          <a:xfrm>
+            <a:off x="1645920" y="4069080"/>
+            <a:ext cx="9601200" cy="365760"/>
+          </a:xfrm>
+          <a:prstGeom prst="rect">
+            <a:avLst/>
+          </a:prstGeom>
+          <a:noFill/>
+        </p:spPr>
+        <p:txBody>
+          <a:bodyPr wrap="square">
+            <a:spAutoFit/>
+          </a:bodyPr>
+          <a:lstStyle/>
+          <a:p>
+            <a:pPr algn="l"/>
+            <a:r>
+              <a:rPr sz="1400" b="0">
+                <a:solidFill>
+                  <a:srgbClr val="8FB0D4"/>
+                </a:solidFill>
+                <a:latin typeface="Microsoft YaHei"/>
+                <a:ea typeface="Microsoft YaHei"/>
+              </a:rPr>
+              <a:t>engine 抽象 InterviewEngine，上层只依赖接口，可零改动替换真实大模型</a:t>
+            </a:r>
+          </a:p>
+        </p:txBody>
+      </p:sp>
+      <p:sp>
+        <p:nvSpPr>
+          <p:cNvPr id="15" name="TextBox 14"/>
+          <p:cNvSpPr txBox="1"/>
+          <p:nvPr/>
+        </p:nvSpPr>
+        <p:spPr>
+          <a:xfrm>
+            <a:off x="822960" y="4526280"/>
             <a:ext cx="731520" cy="548640"/>
           </a:xfrm>
           <a:prstGeom prst="rect">
@@ -5308,7 +6286,7 @@
           <a:noFill/>
         </p:spPr>
         <p:txBody>
-          <a:bodyPr wrap="square" anchor="t">
+          <a:bodyPr wrap="square">
             <a:spAutoFit/>
           </a:bodyPr>
           <a:lstStyle/>
@@ -5322,56 +6300,92 @@
                 <a:latin typeface="Consolas"/>
                 <a:ea typeface="Consolas"/>
               </a:rPr>
-              <a:t>4</a:t>
-            </a:r>
-          </a:p>
-        </p:txBody>
-      </p:sp>
-      <p:sp>
-        <p:nvSpPr>
-          <p:cNvPr id="13" name="TextBox 12"/>
-          <p:cNvSpPr txBox="1"/>
-          <p:nvPr/>
-        </p:nvSpPr>
-        <p:spPr>
-          <a:xfrm>
-            <a:off x="1645920" y="4297679"/>
-            <a:ext cx="9601200" cy="548640"/>
-          </a:xfrm>
-          <a:prstGeom prst="rect">
-            <a:avLst/>
-          </a:prstGeom>
-          <a:noFill/>
-        </p:spPr>
-        <p:txBody>
-          <a:bodyPr wrap="square" anchor="t">
-            <a:spAutoFit/>
-          </a:bodyPr>
-          <a:lstStyle/>
-          <a:p>
-            <a:pPr algn="l"/>
-            <a:r>
-              <a:rPr sz="2000" b="0">
+              <a:t>04</a:t>
+            </a:r>
+          </a:p>
+        </p:txBody>
+      </p:sp>
+      <p:sp>
+        <p:nvSpPr>
+          <p:cNvPr id="16" name="TextBox 15"/>
+          <p:cNvSpPr txBox="1"/>
+          <p:nvPr/>
+        </p:nvSpPr>
+        <p:spPr>
+          <a:xfrm>
+            <a:off x="1645920" y="4572000"/>
+            <a:ext cx="9601200" cy="457200"/>
+          </a:xfrm>
+          <a:prstGeom prst="rect">
+            <a:avLst/>
+          </a:prstGeom>
+          <a:noFill/>
+        </p:spPr>
+        <p:txBody>
+          <a:bodyPr wrap="square">
+            <a:spAutoFit/>
+          </a:bodyPr>
+          <a:lstStyle/>
+          <a:p>
+            <a:pPr algn="l"/>
+            <a:r>
+              <a:rPr sz="2000" b="1">
                 <a:solidFill>
                   <a:srgbClr val="D6E4F5"/>
                 </a:solidFill>
                 <a:latin typeface="Microsoft YaHei"/>
                 <a:ea typeface="Microsoft YaHei"/>
               </a:rPr>
-              <a:t>数据隔离：repository 层隔离 SQLite，可替换 PostgreSQL</a:t>
-            </a:r>
-          </a:p>
-        </p:txBody>
-      </p:sp>
-      <p:sp>
-        <p:nvSpPr>
-          <p:cNvPr id="14" name="TextBox 13"/>
-          <p:cNvSpPr txBox="1"/>
-          <p:nvPr/>
-        </p:nvSpPr>
-        <p:spPr>
-          <a:xfrm>
-            <a:off x="822960" y="5029200"/>
+              <a:t>数据访问隔离</a:t>
+            </a:r>
+          </a:p>
+        </p:txBody>
+      </p:sp>
+      <p:sp>
+        <p:nvSpPr>
+          <p:cNvPr id="17" name="TextBox 16"/>
+          <p:cNvSpPr txBox="1"/>
+          <p:nvPr/>
+        </p:nvSpPr>
+        <p:spPr>
+          <a:xfrm>
+            <a:off x="1645920" y="5029200"/>
+            <a:ext cx="9601200" cy="365760"/>
+          </a:xfrm>
+          <a:prstGeom prst="rect">
+            <a:avLst/>
+          </a:prstGeom>
+          <a:noFill/>
+        </p:spPr>
+        <p:txBody>
+          <a:bodyPr wrap="square">
+            <a:spAutoFit/>
+          </a:bodyPr>
+          <a:lstStyle/>
+          <a:p>
+            <a:pPr algn="l"/>
+            <a:r>
+              <a:rPr sz="1400" b="0">
+                <a:solidFill>
+                  <a:srgbClr val="8FB0D4"/>
+                </a:solidFill>
+                <a:latin typeface="Microsoft YaHei"/>
+                <a:ea typeface="Microsoft YaHei"/>
+              </a:rPr>
+              <a:t>repository 层隔离 SQLite，替换 PostgreSQL 仅需改数据访问层</a:t>
+            </a:r>
+          </a:p>
+        </p:txBody>
+      </p:sp>
+      <p:sp>
+        <p:nvSpPr>
+          <p:cNvPr id="18" name="TextBox 17"/>
+          <p:cNvSpPr txBox="1"/>
+          <p:nvPr/>
+        </p:nvSpPr>
+        <p:spPr>
+          <a:xfrm>
+            <a:off x="822960" y="5486400"/>
             <a:ext cx="731520" cy="548640"/>
           </a:xfrm>
           <a:prstGeom prst="rect">
@@ -5380,7 +6394,7 @@
           <a:noFill/>
         </p:spPr>
         <p:txBody>
-          <a:bodyPr wrap="square" anchor="t">
+          <a:bodyPr wrap="square">
             <a:spAutoFit/>
           </a:bodyPr>
           <a:lstStyle/>
@@ -5389,48 +6403,84 @@
             <a:r>
               <a:rPr sz="2200" b="1">
                 <a:solidFill>
-                  <a:srgbClr val="4FC3F7"/>
+                  <a:srgbClr val="FFB74D"/>
                 </a:solidFill>
                 <a:latin typeface="Consolas"/>
                 <a:ea typeface="Consolas"/>
               </a:rPr>
-              <a:t>5</a:t>
-            </a:r>
-          </a:p>
-        </p:txBody>
-      </p:sp>
-      <p:sp>
-        <p:nvSpPr>
-          <p:cNvPr id="15" name="TextBox 14"/>
-          <p:cNvSpPr txBox="1"/>
-          <p:nvPr/>
-        </p:nvSpPr>
-        <p:spPr>
-          <a:xfrm>
-            <a:off x="1645920" y="5120640"/>
-            <a:ext cx="9601200" cy="548640"/>
-          </a:xfrm>
-          <a:prstGeom prst="rect">
-            <a:avLst/>
-          </a:prstGeom>
-          <a:noFill/>
-        </p:spPr>
-        <p:txBody>
-          <a:bodyPr wrap="square" anchor="t">
-            <a:spAutoFit/>
-          </a:bodyPr>
-          <a:lstStyle/>
-          <a:p>
-            <a:pPr algn="l"/>
-            <a:r>
-              <a:rPr sz="2000" b="0">
+              <a:t>05</a:t>
+            </a:r>
+          </a:p>
+        </p:txBody>
+      </p:sp>
+      <p:sp>
+        <p:nvSpPr>
+          <p:cNvPr id="19" name="TextBox 18"/>
+          <p:cNvSpPr txBox="1"/>
+          <p:nvPr/>
+        </p:nvSpPr>
+        <p:spPr>
+          <a:xfrm>
+            <a:off x="1645920" y="5532120"/>
+            <a:ext cx="9601200" cy="457200"/>
+          </a:xfrm>
+          <a:prstGeom prst="rect">
+            <a:avLst/>
+          </a:prstGeom>
+          <a:noFill/>
+        </p:spPr>
+        <p:txBody>
+          <a:bodyPr wrap="square">
+            <a:spAutoFit/>
+          </a:bodyPr>
+          <a:lstStyle/>
+          <a:p>
+            <a:pPr algn="l"/>
+            <a:r>
+              <a:rPr sz="2000" b="1">
                 <a:solidFill>
                   <a:srgbClr val="D6E4F5"/>
                 </a:solidFill>
                 <a:latin typeface="Microsoft YaHei"/>
                 <a:ea typeface="Microsoft YaHei"/>
               </a:rPr>
-              <a:t>前后端闭环：单服务联动 + mock 测试 + 完整文档</a:t>
+              <a:t>前后端完整闭环</a:t>
+            </a:r>
+          </a:p>
+        </p:txBody>
+      </p:sp>
+      <p:sp>
+        <p:nvSpPr>
+          <p:cNvPr id="20" name="TextBox 19"/>
+          <p:cNvSpPr txBox="1"/>
+          <p:nvPr/>
+        </p:nvSpPr>
+        <p:spPr>
+          <a:xfrm>
+            <a:off x="1645920" y="5989320"/>
+            <a:ext cx="9601200" cy="365760"/>
+          </a:xfrm>
+          <a:prstGeom prst="rect">
+            <a:avLst/>
+          </a:prstGeom>
+          <a:noFill/>
+        </p:spPr>
+        <p:txBody>
+          <a:bodyPr wrap="square">
+            <a:spAutoFit/>
+          </a:bodyPr>
+          <a:lstStyle/>
+          <a:p>
+            <a:pPr algn="l"/>
+            <a:r>
+              <a:rPr sz="1400" b="0">
+                <a:solidFill>
+                  <a:srgbClr val="8FB0D4"/>
+                </a:solidFill>
+                <a:latin typeface="Microsoft YaHei"/>
+                <a:ea typeface="Microsoft YaHei"/>
+              </a:rPr>
+              <a:t>单服务联动 + mock 测试 + 完整 API 文档与测试报告</a:t>
             </a:r>
           </a:p>
         </p:txBody>
@@ -5505,7 +6555,7 @@
         </p:nvSpPr>
         <p:spPr>
           <a:xfrm>
-            <a:off x="0" y="1463040"/>
+            <a:off x="0" y="1371600"/>
             <a:ext cx="12191695" cy="914400"/>
           </a:xfrm>
           <a:prstGeom prst="rect">
@@ -5514,7 +6564,7 @@
           <a:noFill/>
         </p:spPr>
         <p:txBody>
-          <a:bodyPr wrap="square" anchor="t">
+          <a:bodyPr wrap="square">
             <a:spAutoFit/>
           </a:bodyPr>
           <a:lstStyle/>
@@ -5541,30 +6591,30 @@
         </p:nvSpPr>
         <p:spPr>
           <a:xfrm>
-            <a:off x="3200400" y="2651760"/>
-            <a:ext cx="548640" cy="457200"/>
-          </a:xfrm>
-          <a:prstGeom prst="rect">
-            <a:avLst/>
-          </a:prstGeom>
-          <a:noFill/>
-        </p:spPr>
-        <p:txBody>
-          <a:bodyPr wrap="square" anchor="t">
-            <a:spAutoFit/>
-          </a:bodyPr>
-          <a:lstStyle/>
-          <a:p>
-            <a:pPr algn="l"/>
-            <a:r>
-              <a:rPr sz="1800" b="0">
-                <a:solidFill>
-                  <a:srgbClr val="4FC3F7"/>
+            <a:off x="0" y="2286000"/>
+            <a:ext cx="12191695" cy="457200"/>
+          </a:xfrm>
+          <a:prstGeom prst="rect">
+            <a:avLst/>
+          </a:prstGeom>
+          <a:noFill/>
+        </p:spPr>
+        <p:txBody>
+          <a:bodyPr wrap="square">
+            <a:spAutoFit/>
+          </a:bodyPr>
+          <a:lstStyle/>
+          <a:p>
+            <a:pPr algn="ctr"/>
+            <a:r>
+              <a:rPr sz="2000" b="0">
+                <a:solidFill>
+                  <a:srgbClr val="8FB0D4"/>
                 </a:solidFill>
                 <a:latin typeface="Microsoft YaHei"/>
                 <a:ea typeface="Microsoft YaHei"/>
               </a:rPr>
-              <a:t>→</a:t>
+              <a:t>MVP 已闭环，明确的下一个演进方向</a:t>
             </a:r>
           </a:p>
         </p:txBody>
@@ -5577,7 +6627,43 @@
         </p:nvSpPr>
         <p:spPr>
           <a:xfrm>
-            <a:off x="3840480" y="2651760"/>
+            <a:off x="3200400" y="3017520"/>
+            <a:ext cx="548640" cy="457200"/>
+          </a:xfrm>
+          <a:prstGeom prst="rect">
+            <a:avLst/>
+          </a:prstGeom>
+          <a:noFill/>
+        </p:spPr>
+        <p:txBody>
+          <a:bodyPr wrap="square">
+            <a:spAutoFit/>
+          </a:bodyPr>
+          <a:lstStyle/>
+          <a:p>
+            <a:pPr algn="l"/>
+            <a:r>
+              <a:rPr sz="2000" b="1">
+                <a:solidFill>
+                  <a:srgbClr val="4FC3F7"/>
+                </a:solidFill>
+                <a:latin typeface="Consolas"/>
+                <a:ea typeface="Consolas"/>
+              </a:rPr>
+              <a:t>01</a:t>
+            </a:r>
+          </a:p>
+        </p:txBody>
+      </p:sp>
+      <p:sp>
+        <p:nvSpPr>
+          <p:cNvPr id="6" name="TextBox 5"/>
+          <p:cNvSpPr txBox="1"/>
+          <p:nvPr/>
+        </p:nvSpPr>
+        <p:spPr>
+          <a:xfrm>
+            <a:off x="3840480" y="3017520"/>
             <a:ext cx="5943600" cy="457200"/>
           </a:xfrm>
           <a:prstGeom prst="rect">
@@ -5586,7 +6672,7 @@
           <a:noFill/>
         </p:spPr>
         <p:txBody>
-          <a:bodyPr wrap="square" anchor="t">
+          <a:bodyPr wrap="square">
             <a:spAutoFit/>
           </a:bodyPr>
           <a:lstStyle/>
@@ -5607,13 +6693,13 @@
       </p:sp>
       <p:sp>
         <p:nvSpPr>
-          <p:cNvPr id="6" name="TextBox 5"/>
-          <p:cNvSpPr txBox="1"/>
-          <p:nvPr/>
-        </p:nvSpPr>
-        <p:spPr>
-          <a:xfrm>
-            <a:off x="3200400" y="3291839"/>
+          <p:cNvPr id="7" name="TextBox 6"/>
+          <p:cNvSpPr txBox="1"/>
+          <p:nvPr/>
+        </p:nvSpPr>
+        <p:spPr>
+          <a:xfrm>
+            <a:off x="3200400" y="3566160"/>
             <a:ext cx="548640" cy="457200"/>
           </a:xfrm>
           <a:prstGeom prst="rect">
@@ -5622,7 +6708,43 @@
           <a:noFill/>
         </p:spPr>
         <p:txBody>
-          <a:bodyPr wrap="square" anchor="t">
+          <a:bodyPr wrap="square">
+            <a:spAutoFit/>
+          </a:bodyPr>
+          <a:lstStyle/>
+          <a:p>
+            <a:pPr algn="l"/>
+            <a:r>
+              <a:rPr sz="2000" b="1">
+                <a:solidFill>
+                  <a:srgbClr val="4FC3F7"/>
+                </a:solidFill>
+                <a:latin typeface="Consolas"/>
+                <a:ea typeface="Consolas"/>
+              </a:rPr>
+              <a:t>02</a:t>
+            </a:r>
+          </a:p>
+        </p:txBody>
+      </p:sp>
+      <p:sp>
+        <p:nvSpPr>
+          <p:cNvPr id="8" name="TextBox 7"/>
+          <p:cNvSpPr txBox="1"/>
+          <p:nvPr/>
+        </p:nvSpPr>
+        <p:spPr>
+          <a:xfrm>
+            <a:off x="3840480" y="3566160"/>
+            <a:ext cx="5943600" cy="457200"/>
+          </a:xfrm>
+          <a:prstGeom prst="rect">
+            <a:avLst/>
+          </a:prstGeom>
+          <a:noFill/>
+        </p:spPr>
+        <p:txBody>
+          <a:bodyPr wrap="square">
             <a:spAutoFit/>
           </a:bodyPr>
           <a:lstStyle/>
@@ -5631,25 +6753,61 @@
             <a:r>
               <a:rPr sz="1800" b="0">
                 <a:solidFill>
-                  <a:srgbClr val="4FC3F7"/>
+                  <a:srgbClr val="D6E4F5"/>
                 </a:solidFill>
                 <a:latin typeface="Microsoft YaHei"/>
                 <a:ea typeface="Microsoft YaHei"/>
               </a:rPr>
-              <a:t>→</a:t>
-            </a:r>
-          </a:p>
-        </p:txBody>
-      </p:sp>
-      <p:sp>
-        <p:nvSpPr>
-          <p:cNvPr id="7" name="TextBox 6"/>
-          <p:cNvSpPr txBox="1"/>
-          <p:nvPr/>
-        </p:nvSpPr>
-        <p:spPr>
-          <a:xfrm>
-            <a:off x="3840480" y="3291839"/>
+              <a:t>语音面试：语音识别 + 语音合成</a:t>
+            </a:r>
+          </a:p>
+        </p:txBody>
+      </p:sp>
+      <p:sp>
+        <p:nvSpPr>
+          <p:cNvPr id="9" name="TextBox 8"/>
+          <p:cNvSpPr txBox="1"/>
+          <p:nvPr/>
+        </p:nvSpPr>
+        <p:spPr>
+          <a:xfrm>
+            <a:off x="3200400" y="4114800"/>
+            <a:ext cx="548640" cy="457200"/>
+          </a:xfrm>
+          <a:prstGeom prst="rect">
+            <a:avLst/>
+          </a:prstGeom>
+          <a:noFill/>
+        </p:spPr>
+        <p:txBody>
+          <a:bodyPr wrap="square">
+            <a:spAutoFit/>
+          </a:bodyPr>
+          <a:lstStyle/>
+          <a:p>
+            <a:pPr algn="l"/>
+            <a:r>
+              <a:rPr sz="2000" b="1">
+                <a:solidFill>
+                  <a:srgbClr val="4FC3F7"/>
+                </a:solidFill>
+                <a:latin typeface="Consolas"/>
+                <a:ea typeface="Consolas"/>
+              </a:rPr>
+              <a:t>03</a:t>
+            </a:r>
+          </a:p>
+        </p:txBody>
+      </p:sp>
+      <p:sp>
+        <p:nvSpPr>
+          <p:cNvPr id="10" name="TextBox 9"/>
+          <p:cNvSpPr txBox="1"/>
+          <p:nvPr/>
+        </p:nvSpPr>
+        <p:spPr>
+          <a:xfrm>
+            <a:off x="3840480" y="4114800"/>
             <a:ext cx="5943600" cy="457200"/>
           </a:xfrm>
           <a:prstGeom prst="rect">
@@ -5658,7 +6816,7 @@
           <a:noFill/>
         </p:spPr>
         <p:txBody>
-          <a:bodyPr wrap="square" anchor="t">
+          <a:bodyPr wrap="square">
             <a:spAutoFit/>
           </a:bodyPr>
           <a:lstStyle/>
@@ -5672,20 +6830,20 @@
                 <a:latin typeface="Microsoft YaHei"/>
                 <a:ea typeface="Microsoft YaHei"/>
               </a:rPr>
-              <a:t>语音面试：语音识别 + 语音合成</a:t>
-            </a:r>
-          </a:p>
-        </p:txBody>
-      </p:sp>
-      <p:sp>
-        <p:nvSpPr>
-          <p:cNvPr id="8" name="TextBox 7"/>
-          <p:cNvSpPr txBox="1"/>
-          <p:nvPr/>
-        </p:nvSpPr>
-        <p:spPr>
-          <a:xfrm>
-            <a:off x="3200400" y="3931920"/>
+              <a:t>动态追问与多轮深入对话</a:t>
+            </a:r>
+          </a:p>
+        </p:txBody>
+      </p:sp>
+      <p:sp>
+        <p:nvSpPr>
+          <p:cNvPr id="11" name="TextBox 10"/>
+          <p:cNvSpPr txBox="1"/>
+          <p:nvPr/>
+        </p:nvSpPr>
+        <p:spPr>
+          <a:xfrm>
+            <a:off x="3200400" y="4663440"/>
             <a:ext cx="548640" cy="457200"/>
           </a:xfrm>
           <a:prstGeom prst="rect">
@@ -5694,7 +6852,43 @@
           <a:noFill/>
         </p:spPr>
         <p:txBody>
-          <a:bodyPr wrap="square" anchor="t">
+          <a:bodyPr wrap="square">
+            <a:spAutoFit/>
+          </a:bodyPr>
+          <a:lstStyle/>
+          <a:p>
+            <a:pPr algn="l"/>
+            <a:r>
+              <a:rPr sz="2000" b="1">
+                <a:solidFill>
+                  <a:srgbClr val="4FC3F7"/>
+                </a:solidFill>
+                <a:latin typeface="Consolas"/>
+                <a:ea typeface="Consolas"/>
+              </a:rPr>
+              <a:t>04</a:t>
+            </a:r>
+          </a:p>
+        </p:txBody>
+      </p:sp>
+      <p:sp>
+        <p:nvSpPr>
+          <p:cNvPr id="12" name="TextBox 11"/>
+          <p:cNvSpPr txBox="1"/>
+          <p:nvPr/>
+        </p:nvSpPr>
+        <p:spPr>
+          <a:xfrm>
+            <a:off x="3840480" y="4663440"/>
+            <a:ext cx="5943600" cy="457200"/>
+          </a:xfrm>
+          <a:prstGeom prst="rect">
+            <a:avLst/>
+          </a:prstGeom>
+          <a:noFill/>
+        </p:spPr>
+        <p:txBody>
+          <a:bodyPr wrap="square">
             <a:spAutoFit/>
           </a:bodyPr>
           <a:lstStyle/>
@@ -5703,25 +6897,61 @@
             <a:r>
               <a:rPr sz="1800" b="0">
                 <a:solidFill>
-                  <a:srgbClr val="4FC3F7"/>
+                  <a:srgbClr val="D6E4F5"/>
                 </a:solidFill>
                 <a:latin typeface="Microsoft YaHei"/>
                 <a:ea typeface="Microsoft YaHei"/>
               </a:rPr>
-              <a:t>→</a:t>
-            </a:r>
-          </a:p>
-        </p:txBody>
-      </p:sp>
-      <p:sp>
-        <p:nvSpPr>
-          <p:cNvPr id="9" name="TextBox 8"/>
-          <p:cNvSpPr txBox="1"/>
-          <p:nvPr/>
-        </p:nvSpPr>
-        <p:spPr>
-          <a:xfrm>
-            <a:off x="3840480" y="3931920"/>
+              <a:t>用户账号跨设备同步</a:t>
+            </a:r>
+          </a:p>
+        </p:txBody>
+      </p:sp>
+      <p:sp>
+        <p:nvSpPr>
+          <p:cNvPr id="13" name="TextBox 12"/>
+          <p:cNvSpPr txBox="1"/>
+          <p:nvPr/>
+        </p:nvSpPr>
+        <p:spPr>
+          <a:xfrm>
+            <a:off x="3200400" y="5212079"/>
+            <a:ext cx="548640" cy="457200"/>
+          </a:xfrm>
+          <a:prstGeom prst="rect">
+            <a:avLst/>
+          </a:prstGeom>
+          <a:noFill/>
+        </p:spPr>
+        <p:txBody>
+          <a:bodyPr wrap="square">
+            <a:spAutoFit/>
+          </a:bodyPr>
+          <a:lstStyle/>
+          <a:p>
+            <a:pPr algn="l"/>
+            <a:r>
+              <a:rPr sz="2000" b="1">
+                <a:solidFill>
+                  <a:srgbClr val="FFB74D"/>
+                </a:solidFill>
+                <a:latin typeface="Consolas"/>
+                <a:ea typeface="Consolas"/>
+              </a:rPr>
+              <a:t>05</a:t>
+            </a:r>
+          </a:p>
+        </p:txBody>
+      </p:sp>
+      <p:sp>
+        <p:nvSpPr>
+          <p:cNvPr id="14" name="TextBox 13"/>
+          <p:cNvSpPr txBox="1"/>
+          <p:nvPr/>
+        </p:nvSpPr>
+        <p:spPr>
+          <a:xfrm>
+            <a:off x="3840480" y="5212079"/>
             <a:ext cx="5943600" cy="457200"/>
           </a:xfrm>
           <a:prstGeom prst="rect">
@@ -5730,7 +6960,7 @@
           <a:noFill/>
         </p:spPr>
         <p:txBody>
-          <a:bodyPr wrap="square" anchor="t">
+          <a:bodyPr wrap="square">
             <a:spAutoFit/>
           </a:bodyPr>
           <a:lstStyle/>
@@ -5744,187 +6974,43 @@
                 <a:latin typeface="Microsoft YaHei"/>
                 <a:ea typeface="Microsoft YaHei"/>
               </a:rPr>
-              <a:t>动态追问与多轮深入对话</a:t>
-            </a:r>
-          </a:p>
-        </p:txBody>
-      </p:sp>
-      <p:sp>
-        <p:nvSpPr>
-          <p:cNvPr id="10" name="TextBox 9"/>
-          <p:cNvSpPr txBox="1"/>
-          <p:nvPr/>
-        </p:nvSpPr>
-        <p:spPr>
-          <a:xfrm>
-            <a:off x="3200400" y="4572000"/>
-            <a:ext cx="548640" cy="457200"/>
-          </a:xfrm>
-          <a:prstGeom prst="rect">
-            <a:avLst/>
-          </a:prstGeom>
-          <a:noFill/>
-        </p:spPr>
-        <p:txBody>
-          <a:bodyPr wrap="square" anchor="t">
-            <a:spAutoFit/>
-          </a:bodyPr>
-          <a:lstStyle/>
-          <a:p>
-            <a:pPr algn="l"/>
-            <a:r>
-              <a:rPr sz="1800" b="0">
-                <a:solidFill>
-                  <a:srgbClr val="4FC3F7"/>
+              <a:t>面试评分（分维度量化）与成长曲线</a:t>
+            </a:r>
+          </a:p>
+        </p:txBody>
+      </p:sp>
+      <p:sp>
+        <p:nvSpPr>
+          <p:cNvPr id="15" name="TextBox 14"/>
+          <p:cNvSpPr txBox="1"/>
+          <p:nvPr/>
+        </p:nvSpPr>
+        <p:spPr>
+          <a:xfrm>
+            <a:off x="0" y="6035040"/>
+            <a:ext cx="12191695" cy="457200"/>
+          </a:xfrm>
+          <a:prstGeom prst="rect">
+            <a:avLst/>
+          </a:prstGeom>
+          <a:noFill/>
+        </p:spPr>
+        <p:txBody>
+          <a:bodyPr wrap="square">
+            <a:spAutoFit/>
+          </a:bodyPr>
+          <a:lstStyle/>
+          <a:p>
+            <a:pPr algn="ctr"/>
+            <a:r>
+              <a:rPr sz="1600" b="0">
+                <a:solidFill>
+                  <a:srgbClr val="8FB0D4"/>
                 </a:solidFill>
                 <a:latin typeface="Microsoft YaHei"/>
                 <a:ea typeface="Microsoft YaHei"/>
               </a:rPr>
-              <a:t>→</a:t>
-            </a:r>
-          </a:p>
-        </p:txBody>
-      </p:sp>
-      <p:sp>
-        <p:nvSpPr>
-          <p:cNvPr id="11" name="TextBox 10"/>
-          <p:cNvSpPr txBox="1"/>
-          <p:nvPr/>
-        </p:nvSpPr>
-        <p:spPr>
-          <a:xfrm>
-            <a:off x="3840480" y="4572000"/>
-            <a:ext cx="5943600" cy="457200"/>
-          </a:xfrm>
-          <a:prstGeom prst="rect">
-            <a:avLst/>
-          </a:prstGeom>
-          <a:noFill/>
-        </p:spPr>
-        <p:txBody>
-          <a:bodyPr wrap="square" anchor="t">
-            <a:spAutoFit/>
-          </a:bodyPr>
-          <a:lstStyle/>
-          <a:p>
-            <a:pPr algn="l"/>
-            <a:r>
-              <a:rPr sz="1800" b="0">
-                <a:solidFill>
-                  <a:srgbClr val="D6E4F5"/>
-                </a:solidFill>
-                <a:latin typeface="Microsoft YaHei"/>
-                <a:ea typeface="Microsoft YaHei"/>
-              </a:rPr>
-              <a:t>用户账号跨设备同步</a:t>
-            </a:r>
-          </a:p>
-        </p:txBody>
-      </p:sp>
-      <p:sp>
-        <p:nvSpPr>
-          <p:cNvPr id="12" name="TextBox 11"/>
-          <p:cNvSpPr txBox="1"/>
-          <p:nvPr/>
-        </p:nvSpPr>
-        <p:spPr>
-          <a:xfrm>
-            <a:off x="3200400" y="5212079"/>
-            <a:ext cx="548640" cy="457200"/>
-          </a:xfrm>
-          <a:prstGeom prst="rect">
-            <a:avLst/>
-          </a:prstGeom>
-          <a:noFill/>
-        </p:spPr>
-        <p:txBody>
-          <a:bodyPr wrap="square" anchor="t">
-            <a:spAutoFit/>
-          </a:bodyPr>
-          <a:lstStyle/>
-          <a:p>
-            <a:pPr algn="l"/>
-            <a:r>
-              <a:rPr sz="1800" b="0">
-                <a:solidFill>
-                  <a:srgbClr val="4FC3F7"/>
-                </a:solidFill>
-                <a:latin typeface="Microsoft YaHei"/>
-                <a:ea typeface="Microsoft YaHei"/>
-              </a:rPr>
-              <a:t>→</a:t>
-            </a:r>
-          </a:p>
-        </p:txBody>
-      </p:sp>
-      <p:sp>
-        <p:nvSpPr>
-          <p:cNvPr id="13" name="TextBox 12"/>
-          <p:cNvSpPr txBox="1"/>
-          <p:nvPr/>
-        </p:nvSpPr>
-        <p:spPr>
-          <a:xfrm>
-            <a:off x="3840480" y="5212079"/>
-            <a:ext cx="5943600" cy="457200"/>
-          </a:xfrm>
-          <a:prstGeom prst="rect">
-            <a:avLst/>
-          </a:prstGeom>
-          <a:noFill/>
-        </p:spPr>
-        <p:txBody>
-          <a:bodyPr wrap="square" anchor="t">
-            <a:spAutoFit/>
-          </a:bodyPr>
-          <a:lstStyle/>
-          <a:p>
-            <a:pPr algn="l"/>
-            <a:r>
-              <a:rPr sz="1800" b="0">
-                <a:solidFill>
-                  <a:srgbClr val="D6E4F5"/>
-                </a:solidFill>
-                <a:latin typeface="Microsoft YaHei"/>
-                <a:ea typeface="Microsoft YaHei"/>
-              </a:rPr>
-              <a:t>面试评分与成长曲线</a:t>
-            </a:r>
-          </a:p>
-        </p:txBody>
-      </p:sp>
-      <p:sp>
-        <p:nvSpPr>
-          <p:cNvPr id="14" name="TextBox 13"/>
-          <p:cNvSpPr txBox="1"/>
-          <p:nvPr/>
-        </p:nvSpPr>
-        <p:spPr>
-          <a:xfrm>
-            <a:off x="0" y="6035040"/>
-            <a:ext cx="12191695" cy="457200"/>
-          </a:xfrm>
-          <a:prstGeom prst="rect">
-            <a:avLst/>
-          </a:prstGeom>
-          <a:noFill/>
-        </p:spPr>
-        <p:txBody>
-          <a:bodyPr wrap="square" anchor="t">
-            <a:spAutoFit/>
-          </a:bodyPr>
-          <a:lstStyle/>
-          <a:p>
-            <a:pPr algn="ctr"/>
-            <a:r>
-              <a:rPr sz="1600" b="0">
-                <a:solidFill>
-                  <a:srgbClr val="8FB0D4"/>
-                </a:solidFill>
-                <a:latin typeface="Microsoft YaHei"/>
-                <a:ea typeface="Microsoft YaHei"/>
-              </a:rPr>
-              <a:t>MVP 已闭环 · 感谢观看</a:t>
+              <a:t>感谢观看 · 欢迎交流</a:t>
             </a:r>
           </a:p>
         </p:txBody>
@@ -6008,7 +7094,7 @@
           <a:noFill/>
         </p:spPr>
         <p:txBody>
-          <a:bodyPr wrap="square" anchor="t">
+          <a:bodyPr wrap="square">
             <a:spAutoFit/>
           </a:bodyPr>
           <a:lstStyle/>
@@ -6088,7 +7174,7 @@
           <a:noFill/>
         </p:spPr>
         <p:txBody>
-          <a:bodyPr wrap="square" anchor="t">
+          <a:bodyPr wrap="square">
             <a:spAutoFit/>
           </a:bodyPr>
           <a:lstStyle/>
@@ -6124,7 +7210,7 @@
           <a:noFill/>
         </p:spPr>
         <p:txBody>
-          <a:bodyPr wrap="square" anchor="t">
+          <a:bodyPr wrap="square">
             <a:spAutoFit/>
           </a:bodyPr>
           <a:lstStyle/>
@@ -6160,7 +7246,7 @@
           <a:noFill/>
         </p:spPr>
         <p:txBody>
-          <a:bodyPr wrap="square" anchor="t">
+          <a:bodyPr wrap="square">
             <a:spAutoFit/>
           </a:bodyPr>
           <a:lstStyle/>
@@ -6196,7 +7282,7 @@
           <a:noFill/>
         </p:spPr>
         <p:txBody>
-          <a:bodyPr wrap="square" anchor="t">
+          <a:bodyPr wrap="square">
             <a:spAutoFit/>
           </a:bodyPr>
           <a:lstStyle/>
@@ -6232,7 +7318,7 @@
           <a:noFill/>
         </p:spPr>
         <p:txBody>
-          <a:bodyPr wrap="square" anchor="t">
+          <a:bodyPr wrap="square">
             <a:spAutoFit/>
           </a:bodyPr>
           <a:lstStyle/>
@@ -6268,7 +7354,7 @@
           <a:noFill/>
         </p:spPr>
         <p:txBody>
-          <a:bodyPr wrap="square" anchor="t">
+          <a:bodyPr wrap="square">
             <a:spAutoFit/>
           </a:bodyPr>
           <a:lstStyle/>
@@ -6304,7 +7390,7 @@
           <a:noFill/>
         </p:spPr>
         <p:txBody>
-          <a:bodyPr wrap="square" anchor="t">
+          <a:bodyPr wrap="square">
             <a:spAutoFit/>
           </a:bodyPr>
           <a:lstStyle/>
@@ -6340,7 +7426,7 @@
           <a:noFill/>
         </p:spPr>
         <p:txBody>
-          <a:bodyPr wrap="square" anchor="t">
+          <a:bodyPr wrap="square">
             <a:spAutoFit/>
           </a:bodyPr>
           <a:lstStyle/>
@@ -6376,7 +7462,7 @@
           <a:noFill/>
         </p:spPr>
         <p:txBody>
-          <a:bodyPr wrap="square" anchor="t">
+          <a:bodyPr wrap="square">
             <a:spAutoFit/>
           </a:bodyPr>
           <a:lstStyle/>
@@ -6412,7 +7498,7 @@
           <a:noFill/>
         </p:spPr>
         <p:txBody>
-          <a:bodyPr wrap="square" anchor="t">
+          <a:bodyPr wrap="square">
             <a:spAutoFit/>
           </a:bodyPr>
           <a:lstStyle/>
@@ -6448,7 +7534,7 @@
           <a:noFill/>
         </p:spPr>
         <p:txBody>
-          <a:bodyPr wrap="square" anchor="t">
+          <a:bodyPr wrap="square">
             <a:spAutoFit/>
           </a:bodyPr>
           <a:lstStyle/>
@@ -6484,7 +7570,7 @@
           <a:noFill/>
         </p:spPr>
         <p:txBody>
-          <a:bodyPr wrap="square" anchor="t">
+          <a:bodyPr wrap="square">
             <a:spAutoFit/>
           </a:bodyPr>
           <a:lstStyle/>
@@ -6520,7 +7606,7 @@
           <a:noFill/>
         </p:spPr>
         <p:txBody>
-          <a:bodyPr wrap="square" anchor="t">
+          <a:bodyPr wrap="square">
             <a:spAutoFit/>
           </a:bodyPr>
           <a:lstStyle/>
@@ -6556,7 +7642,7 @@
           <a:noFill/>
         </p:spPr>
         <p:txBody>
-          <a:bodyPr wrap="square" anchor="t">
+          <a:bodyPr wrap="square">
             <a:spAutoFit/>
           </a:bodyPr>
           <a:lstStyle/>
@@ -6592,7 +7678,7 @@
           <a:noFill/>
         </p:spPr>
         <p:txBody>
-          <a:bodyPr wrap="square" anchor="t">
+          <a:bodyPr wrap="square">
             <a:spAutoFit/>
           </a:bodyPr>
           <a:lstStyle/>
@@ -6690,7 +7776,7 @@
           <a:noFill/>
         </p:spPr>
         <p:txBody>
-          <a:bodyPr wrap="square" anchor="t">
+          <a:bodyPr wrap="square">
             <a:spAutoFit/>
           </a:bodyPr>
           <a:lstStyle/>
@@ -6770,7 +7856,7 @@
           <a:noFill/>
         </p:spPr>
         <p:txBody>
-          <a:bodyPr wrap="square" anchor="t">
+          <a:bodyPr wrap="square">
             <a:spAutoFit/>
           </a:bodyPr>
           <a:lstStyle/>
@@ -6791,7 +7877,7 @@
       </p:sp>
       <p:sp>
         <p:nvSpPr>
-          <p:cNvPr id="6" name="Rectangle 5"/>
+          <p:cNvPr id="6" name="Rounded Rectangle 5"/>
           <p:cNvSpPr/>
           <p:nvPr/>
         </p:nvSpPr>
@@ -6800,7 +7886,7 @@
             <a:off x="822960" y="1737360"/>
             <a:ext cx="640080" cy="640080"/>
           </a:xfrm>
-          <a:prstGeom prst="rect">
+          <a:prstGeom prst="roundRect">
             <a:avLst/>
           </a:prstGeom>
           <a:solidFill>
@@ -6843,7 +7929,7 @@
         </p:nvSpPr>
         <p:spPr>
           <a:xfrm>
-            <a:off x="822960" y="1828800"/>
+            <a:off x="822960" y="1847088"/>
             <a:ext cx="640080" cy="457200"/>
           </a:xfrm>
           <a:prstGeom prst="rect">
@@ -6852,7 +7938,7 @@
           <a:noFill/>
         </p:spPr>
         <p:txBody>
-          <a:bodyPr wrap="square" anchor="t">
+          <a:bodyPr wrap="square">
             <a:spAutoFit/>
           </a:bodyPr>
           <a:lstStyle/>
@@ -6888,7 +7974,7 @@
           <a:noFill/>
         </p:spPr>
         <p:txBody>
-          <a:bodyPr wrap="square" anchor="t">
+          <a:bodyPr wrap="square">
             <a:spAutoFit/>
           </a:bodyPr>
           <a:lstStyle/>
@@ -6924,7 +8010,7 @@
           <a:noFill/>
         </p:spPr>
         <p:txBody>
-          <a:bodyPr wrap="square" anchor="t">
+          <a:bodyPr wrap="square">
             <a:spAutoFit/>
           </a:bodyPr>
           <a:lstStyle/>
@@ -6945,7 +8031,7 @@
       </p:sp>
       <p:sp>
         <p:nvSpPr>
-          <p:cNvPr id="10" name="Rectangle 9"/>
+          <p:cNvPr id="10" name="Rounded Rectangle 9"/>
           <p:cNvSpPr/>
           <p:nvPr/>
         </p:nvSpPr>
@@ -6954,7 +8040,7 @@
             <a:off x="822960" y="3108960"/>
             <a:ext cx="640080" cy="640080"/>
           </a:xfrm>
-          <a:prstGeom prst="rect">
+          <a:prstGeom prst="roundRect">
             <a:avLst/>
           </a:prstGeom>
           <a:solidFill>
@@ -6997,7 +8083,7 @@
         </p:nvSpPr>
         <p:spPr>
           <a:xfrm>
-            <a:off x="822960" y="3200400"/>
+            <a:off x="822960" y="3218688"/>
             <a:ext cx="640080" cy="457200"/>
           </a:xfrm>
           <a:prstGeom prst="rect">
@@ -7006,7 +8092,7 @@
           <a:noFill/>
         </p:spPr>
         <p:txBody>
-          <a:bodyPr wrap="square" anchor="t">
+          <a:bodyPr wrap="square">
             <a:spAutoFit/>
           </a:bodyPr>
           <a:lstStyle/>
@@ -7042,7 +8128,7 @@
           <a:noFill/>
         </p:spPr>
         <p:txBody>
-          <a:bodyPr wrap="square" anchor="t">
+          <a:bodyPr wrap="square">
             <a:spAutoFit/>
           </a:bodyPr>
           <a:lstStyle/>
@@ -7078,7 +8164,7 @@
           <a:noFill/>
         </p:spPr>
         <p:txBody>
-          <a:bodyPr wrap="square" anchor="t">
+          <a:bodyPr wrap="square">
             <a:spAutoFit/>
           </a:bodyPr>
           <a:lstStyle/>
@@ -7099,7 +8185,7 @@
       </p:sp>
       <p:sp>
         <p:nvSpPr>
-          <p:cNvPr id="14" name="Rectangle 13"/>
+          <p:cNvPr id="14" name="Rounded Rectangle 13"/>
           <p:cNvSpPr/>
           <p:nvPr/>
         </p:nvSpPr>
@@ -7108,7 +8194,7 @@
             <a:off x="822960" y="4480560"/>
             <a:ext cx="640080" cy="640080"/>
           </a:xfrm>
-          <a:prstGeom prst="rect">
+          <a:prstGeom prst="roundRect">
             <a:avLst/>
           </a:prstGeom>
           <a:solidFill>
@@ -7151,7 +8237,7 @@
         </p:nvSpPr>
         <p:spPr>
           <a:xfrm>
-            <a:off x="822960" y="4572000"/>
+            <a:off x="822960" y="4590288"/>
             <a:ext cx="640080" cy="457200"/>
           </a:xfrm>
           <a:prstGeom prst="rect">
@@ -7160,7 +8246,7 @@
           <a:noFill/>
         </p:spPr>
         <p:txBody>
-          <a:bodyPr wrap="square" anchor="t">
+          <a:bodyPr wrap="square">
             <a:spAutoFit/>
           </a:bodyPr>
           <a:lstStyle/>
@@ -7196,7 +8282,7 @@
           <a:noFill/>
         </p:spPr>
         <p:txBody>
-          <a:bodyPr wrap="square" anchor="t">
+          <a:bodyPr wrap="square">
             <a:spAutoFit/>
           </a:bodyPr>
           <a:lstStyle/>
@@ -7232,7 +8318,7 @@
           <a:noFill/>
         </p:spPr>
         <p:txBody>
-          <a:bodyPr wrap="square" anchor="t">
+          <a:bodyPr wrap="square">
             <a:spAutoFit/>
           </a:bodyPr>
           <a:lstStyle/>
@@ -7330,7 +8416,7 @@
           <a:noFill/>
         </p:spPr>
         <p:txBody>
-          <a:bodyPr wrap="square" anchor="t">
+          <a:bodyPr wrap="square">
             <a:spAutoFit/>
           </a:bodyPr>
           <a:lstStyle/>
@@ -7410,7 +8496,7 @@
           <a:noFill/>
         </p:spPr>
         <p:txBody>
-          <a:bodyPr wrap="square" anchor="t">
+          <a:bodyPr wrap="square">
             <a:spAutoFit/>
           </a:bodyPr>
           <a:lstStyle/>
@@ -7431,7 +8517,7 @@
       </p:sp>
       <p:sp>
         <p:nvSpPr>
-          <p:cNvPr id="6" name="Rectangle 5"/>
+          <p:cNvPr id="6" name="Rounded Rectangle 5"/>
           <p:cNvSpPr/>
           <p:nvPr/>
         </p:nvSpPr>
@@ -7440,7 +8526,7 @@
             <a:off x="822960" y="1828800"/>
             <a:ext cx="3200400" cy="3657600"/>
           </a:xfrm>
-          <a:prstGeom prst="rect">
+          <a:prstGeom prst="roundRect">
             <a:avLst/>
           </a:prstGeom>
           <a:solidFill>
@@ -7492,7 +8578,7 @@
           <a:noFill/>
         </p:spPr>
         <p:txBody>
-          <a:bodyPr wrap="square" anchor="t">
+          <a:bodyPr wrap="square">
             <a:spAutoFit/>
           </a:bodyPr>
           <a:lstStyle/>
@@ -7528,7 +8614,7 @@
           <a:noFill/>
         </p:spPr>
         <p:txBody>
-          <a:bodyPr wrap="square" anchor="t">
+          <a:bodyPr wrap="square">
             <a:spAutoFit/>
           </a:bodyPr>
           <a:lstStyle/>
@@ -7564,7 +8650,7 @@
           <a:noFill/>
         </p:spPr>
         <p:txBody>
-          <a:bodyPr wrap="square" anchor="t">
+          <a:bodyPr wrap="square">
             <a:spAutoFit/>
           </a:bodyPr>
           <a:lstStyle/>
@@ -7600,7 +8686,7 @@
           <a:noFill/>
         </p:spPr>
         <p:txBody>
-          <a:bodyPr wrap="square" anchor="t">
+          <a:bodyPr wrap="square">
             <a:spAutoFit/>
           </a:bodyPr>
           <a:lstStyle/>
@@ -7636,7 +8722,7 @@
           <a:noFill/>
         </p:spPr>
         <p:txBody>
-          <a:bodyPr wrap="square" anchor="t">
+          <a:bodyPr wrap="square">
             <a:spAutoFit/>
           </a:bodyPr>
           <a:lstStyle/>
@@ -7657,7 +8743,7 @@
       </p:sp>
       <p:sp>
         <p:nvSpPr>
-          <p:cNvPr id="12" name="Rectangle 11"/>
+          <p:cNvPr id="12" name="Rounded Rectangle 11"/>
           <p:cNvSpPr/>
           <p:nvPr/>
         </p:nvSpPr>
@@ -7666,7 +8752,7 @@
             <a:off x="4480560" y="1828800"/>
             <a:ext cx="3200400" cy="3657600"/>
           </a:xfrm>
-          <a:prstGeom prst="rect">
+          <a:prstGeom prst="roundRect">
             <a:avLst/>
           </a:prstGeom>
           <a:solidFill>
@@ -7718,7 +8804,7 @@
           <a:noFill/>
         </p:spPr>
         <p:txBody>
-          <a:bodyPr wrap="square" anchor="t">
+          <a:bodyPr wrap="square">
             <a:spAutoFit/>
           </a:bodyPr>
           <a:lstStyle/>
@@ -7754,7 +8840,7 @@
           <a:noFill/>
         </p:spPr>
         <p:txBody>
-          <a:bodyPr wrap="square" anchor="t">
+          <a:bodyPr wrap="square">
             <a:spAutoFit/>
           </a:bodyPr>
           <a:lstStyle/>
@@ -7790,7 +8876,7 @@
           <a:noFill/>
         </p:spPr>
         <p:txBody>
-          <a:bodyPr wrap="square" anchor="t">
+          <a:bodyPr wrap="square">
             <a:spAutoFit/>
           </a:bodyPr>
           <a:lstStyle/>
@@ -7826,7 +8912,7 @@
           <a:noFill/>
         </p:spPr>
         <p:txBody>
-          <a:bodyPr wrap="square" anchor="t">
+          <a:bodyPr wrap="square">
             <a:spAutoFit/>
           </a:bodyPr>
           <a:lstStyle/>
@@ -7862,7 +8948,7 @@
           <a:noFill/>
         </p:spPr>
         <p:txBody>
-          <a:bodyPr wrap="square" anchor="t">
+          <a:bodyPr wrap="square">
             <a:spAutoFit/>
           </a:bodyPr>
           <a:lstStyle/>
@@ -7883,7 +8969,7 @@
       </p:sp>
       <p:sp>
         <p:nvSpPr>
-          <p:cNvPr id="18" name="Rectangle 17"/>
+          <p:cNvPr id="18" name="Rounded Rectangle 17"/>
           <p:cNvSpPr/>
           <p:nvPr/>
         </p:nvSpPr>
@@ -7892,7 +8978,7 @@
             <a:off x="8138160" y="1828800"/>
             <a:ext cx="3200400" cy="3657600"/>
           </a:xfrm>
-          <a:prstGeom prst="rect">
+          <a:prstGeom prst="roundRect">
             <a:avLst/>
           </a:prstGeom>
           <a:solidFill>
@@ -7944,7 +9030,7 @@
           <a:noFill/>
         </p:spPr>
         <p:txBody>
-          <a:bodyPr wrap="square" anchor="t">
+          <a:bodyPr wrap="square">
             <a:spAutoFit/>
           </a:bodyPr>
           <a:lstStyle/>
@@ -7980,7 +9066,7 @@
           <a:noFill/>
         </p:spPr>
         <p:txBody>
-          <a:bodyPr wrap="square" anchor="t">
+          <a:bodyPr wrap="square">
             <a:spAutoFit/>
           </a:bodyPr>
           <a:lstStyle/>
@@ -8016,7 +9102,7 @@
           <a:noFill/>
         </p:spPr>
         <p:txBody>
-          <a:bodyPr wrap="square" anchor="t">
+          <a:bodyPr wrap="square">
             <a:spAutoFit/>
           </a:bodyPr>
           <a:lstStyle/>
@@ -8052,7 +9138,7 @@
           <a:noFill/>
         </p:spPr>
         <p:txBody>
-          <a:bodyPr wrap="square" anchor="t">
+          <a:bodyPr wrap="square">
             <a:spAutoFit/>
           </a:bodyPr>
           <a:lstStyle/>
@@ -8088,7 +9174,7 @@
           <a:noFill/>
         </p:spPr>
         <p:txBody>
-          <a:bodyPr wrap="square" anchor="t">
+          <a:bodyPr wrap="square">
             <a:spAutoFit/>
           </a:bodyPr>
           <a:lstStyle/>
@@ -8186,7 +9272,7 @@
           <a:noFill/>
         </p:spPr>
         <p:txBody>
-          <a:bodyPr wrap="square" anchor="t">
+          <a:bodyPr wrap="square">
             <a:spAutoFit/>
           </a:bodyPr>
           <a:lstStyle/>
@@ -8266,7 +9352,7 @@
           <a:noFill/>
         </p:spPr>
         <p:txBody>
-          <a:bodyPr wrap="square" anchor="t">
+          <a:bodyPr wrap="square">
             <a:spAutoFit/>
           </a:bodyPr>
           <a:lstStyle/>
@@ -8287,7 +9373,7 @@
       </p:sp>
       <p:sp>
         <p:nvSpPr>
-          <p:cNvPr id="6" name="Rectangle 5"/>
+          <p:cNvPr id="6" name="Rounded Rectangle 5"/>
           <p:cNvSpPr/>
           <p:nvPr/>
         </p:nvSpPr>
@@ -8296,7 +9382,7 @@
             <a:off x="822960" y="2011680"/>
             <a:ext cx="2286000" cy="2011680"/>
           </a:xfrm>
-          <a:prstGeom prst="rect">
+          <a:prstGeom prst="roundRect">
             <a:avLst/>
           </a:prstGeom>
           <a:solidFill>
@@ -8348,7 +9434,7 @@
           <a:noFill/>
         </p:spPr>
         <p:txBody>
-          <a:bodyPr wrap="square" anchor="t">
+          <a:bodyPr wrap="square">
             <a:spAutoFit/>
           </a:bodyPr>
           <a:lstStyle/>
@@ -8384,7 +9470,7 @@
           <a:noFill/>
         </p:spPr>
         <p:txBody>
-          <a:bodyPr wrap="square" anchor="t">
+          <a:bodyPr wrap="square">
             <a:spAutoFit/>
           </a:bodyPr>
           <a:lstStyle/>
@@ -8420,7 +9506,7 @@
           <a:noFill/>
         </p:spPr>
         <p:txBody>
-          <a:bodyPr wrap="square" anchor="t">
+          <a:bodyPr wrap="square">
             <a:spAutoFit/>
           </a:bodyPr>
           <a:lstStyle/>
@@ -8456,7 +9542,7 @@
           <a:noFill/>
         </p:spPr>
         <p:txBody>
-          <a:bodyPr wrap="square" anchor="t">
+          <a:bodyPr wrap="square">
             <a:spAutoFit/>
           </a:bodyPr>
           <a:lstStyle/>
@@ -8521,7 +9607,7 @@
       </p:sp>
       <p:sp>
         <p:nvSpPr>
-          <p:cNvPr id="12" name="Rectangle 11"/>
+          <p:cNvPr id="12" name="Rounded Rectangle 11"/>
           <p:cNvSpPr/>
           <p:nvPr/>
         </p:nvSpPr>
@@ -8530,7 +9616,7 @@
             <a:off x="3749040" y="2011680"/>
             <a:ext cx="2286000" cy="2011680"/>
           </a:xfrm>
-          <a:prstGeom prst="rect">
+          <a:prstGeom prst="roundRect">
             <a:avLst/>
           </a:prstGeom>
           <a:solidFill>
@@ -8582,7 +9668,7 @@
           <a:noFill/>
         </p:spPr>
         <p:txBody>
-          <a:bodyPr wrap="square" anchor="t">
+          <a:bodyPr wrap="square">
             <a:spAutoFit/>
           </a:bodyPr>
           <a:lstStyle/>
@@ -8618,7 +9704,7 @@
           <a:noFill/>
         </p:spPr>
         <p:txBody>
-          <a:bodyPr wrap="square" anchor="t">
+          <a:bodyPr wrap="square">
             <a:spAutoFit/>
           </a:bodyPr>
           <a:lstStyle/>
@@ -8654,7 +9740,7 @@
           <a:noFill/>
         </p:spPr>
         <p:txBody>
-          <a:bodyPr wrap="square" anchor="t">
+          <a:bodyPr wrap="square">
             <a:spAutoFit/>
           </a:bodyPr>
           <a:lstStyle/>
@@ -8690,7 +9776,7 @@
           <a:noFill/>
         </p:spPr>
         <p:txBody>
-          <a:bodyPr wrap="square" anchor="t">
+          <a:bodyPr wrap="square">
             <a:spAutoFit/>
           </a:bodyPr>
           <a:lstStyle/>
@@ -8755,7 +9841,7 @@
       </p:sp>
       <p:sp>
         <p:nvSpPr>
-          <p:cNvPr id="18" name="Rectangle 17"/>
+          <p:cNvPr id="18" name="Rounded Rectangle 17"/>
           <p:cNvSpPr/>
           <p:nvPr/>
         </p:nvSpPr>
@@ -8764,7 +9850,7 @@
             <a:off x="6675120" y="2011680"/>
             <a:ext cx="2286000" cy="2011680"/>
           </a:xfrm>
-          <a:prstGeom prst="rect">
+          <a:prstGeom prst="roundRect">
             <a:avLst/>
           </a:prstGeom>
           <a:solidFill>
@@ -8816,7 +9902,7 @@
           <a:noFill/>
         </p:spPr>
         <p:txBody>
-          <a:bodyPr wrap="square" anchor="t">
+          <a:bodyPr wrap="square">
             <a:spAutoFit/>
           </a:bodyPr>
           <a:lstStyle/>
@@ -8852,7 +9938,7 @@
           <a:noFill/>
         </p:spPr>
         <p:txBody>
-          <a:bodyPr wrap="square" anchor="t">
+          <a:bodyPr wrap="square">
             <a:spAutoFit/>
           </a:bodyPr>
           <a:lstStyle/>
@@ -8888,7 +9974,7 @@
           <a:noFill/>
         </p:spPr>
         <p:txBody>
-          <a:bodyPr wrap="square" anchor="t">
+          <a:bodyPr wrap="square">
             <a:spAutoFit/>
           </a:bodyPr>
           <a:lstStyle/>
@@ -8924,7 +10010,7 @@
           <a:noFill/>
         </p:spPr>
         <p:txBody>
-          <a:bodyPr wrap="square" anchor="t">
+          <a:bodyPr wrap="square">
             <a:spAutoFit/>
           </a:bodyPr>
           <a:lstStyle/>
@@ -8989,7 +10075,7 @@
       </p:sp>
       <p:sp>
         <p:nvSpPr>
-          <p:cNvPr id="24" name="Rectangle 23"/>
+          <p:cNvPr id="24" name="Rounded Rectangle 23"/>
           <p:cNvSpPr/>
           <p:nvPr/>
         </p:nvSpPr>
@@ -8998,7 +10084,7 @@
             <a:off x="9601200" y="2011680"/>
             <a:ext cx="2286000" cy="2011680"/>
           </a:xfrm>
-          <a:prstGeom prst="rect">
+          <a:prstGeom prst="roundRect">
             <a:avLst/>
           </a:prstGeom>
           <a:solidFill>
@@ -9050,7 +10136,7 @@
           <a:noFill/>
         </p:spPr>
         <p:txBody>
-          <a:bodyPr wrap="square" anchor="t">
+          <a:bodyPr wrap="square">
             <a:spAutoFit/>
           </a:bodyPr>
           <a:lstStyle/>
@@ -9086,7 +10172,7 @@
           <a:noFill/>
         </p:spPr>
         <p:txBody>
-          <a:bodyPr wrap="square" anchor="t">
+          <a:bodyPr wrap="square">
             <a:spAutoFit/>
           </a:bodyPr>
           <a:lstStyle/>
@@ -9122,7 +10208,7 @@
           <a:noFill/>
         </p:spPr>
         <p:txBody>
-          <a:bodyPr wrap="square" anchor="t">
+          <a:bodyPr wrap="square">
             <a:spAutoFit/>
           </a:bodyPr>
           <a:lstStyle/>
@@ -9158,7 +10244,7 @@
           <a:noFill/>
         </p:spPr>
         <p:txBody>
-          <a:bodyPr wrap="square" anchor="t">
+          <a:bodyPr wrap="square">
             <a:spAutoFit/>
           </a:bodyPr>
           <a:lstStyle/>
@@ -9238,7 +10324,7 @@
           <a:noFill/>
         </p:spPr>
         <p:txBody>
-          <a:bodyPr wrap="square" anchor="t">
+          <a:bodyPr wrap="square">
             <a:spAutoFit/>
           </a:bodyPr>
           <a:lstStyle/>
@@ -9336,7 +10422,7 @@
           <a:noFill/>
         </p:spPr>
         <p:txBody>
-          <a:bodyPr wrap="square" anchor="t">
+          <a:bodyPr wrap="square">
             <a:spAutoFit/>
           </a:bodyPr>
           <a:lstStyle/>
@@ -9416,7 +10502,7 @@
           <a:noFill/>
         </p:spPr>
         <p:txBody>
-          <a:bodyPr wrap="square" anchor="t">
+          <a:bodyPr wrap="square">
             <a:spAutoFit/>
           </a:bodyPr>
           <a:lstStyle/>
@@ -9437,7 +10523,7 @@
       </p:sp>
       <p:sp>
         <p:nvSpPr>
-          <p:cNvPr id="6" name="Rectangle 5"/>
+          <p:cNvPr id="6" name="Rounded Rectangle 5"/>
           <p:cNvSpPr/>
           <p:nvPr/>
         </p:nvSpPr>
@@ -9446,7 +10532,7 @@
             <a:off x="1097280" y="2377440"/>
             <a:ext cx="2926080" cy="1097280"/>
           </a:xfrm>
-          <a:prstGeom prst="rect">
+          <a:prstGeom prst="roundRect">
             <a:avLst/>
           </a:prstGeom>
           <a:solidFill>
@@ -9498,7 +10584,7 @@
           <a:noFill/>
         </p:spPr>
         <p:txBody>
-          <a:bodyPr wrap="square" anchor="t">
+          <a:bodyPr wrap="square">
             <a:spAutoFit/>
           </a:bodyPr>
           <a:lstStyle/>
@@ -9534,7 +10620,7 @@
           <a:noFill/>
         </p:spPr>
         <p:txBody>
-          <a:bodyPr wrap="square" anchor="t">
+          <a:bodyPr wrap="square">
             <a:spAutoFit/>
           </a:bodyPr>
           <a:lstStyle/>
@@ -9555,7 +10641,7 @@
       </p:sp>
       <p:sp>
         <p:nvSpPr>
-          <p:cNvPr id="9" name="Rectangle 8"/>
+          <p:cNvPr id="9" name="Rounded Rectangle 8"/>
           <p:cNvSpPr/>
           <p:nvPr/>
         </p:nvSpPr>
@@ -9564,7 +10650,7 @@
             <a:off x="7315200" y="1737360"/>
             <a:ext cx="2926080" cy="1097280"/>
           </a:xfrm>
-          <a:prstGeom prst="rect">
+          <a:prstGeom prst="roundRect">
             <a:avLst/>
           </a:prstGeom>
           <a:solidFill>
@@ -9616,7 +10702,7 @@
           <a:noFill/>
         </p:spPr>
         <p:txBody>
-          <a:bodyPr wrap="square" anchor="t">
+          <a:bodyPr wrap="square">
             <a:spAutoFit/>
           </a:bodyPr>
           <a:lstStyle/>
@@ -9652,7 +10738,7 @@
           <a:noFill/>
         </p:spPr>
         <p:txBody>
-          <a:bodyPr wrap="square" anchor="t">
+          <a:bodyPr wrap="square">
             <a:spAutoFit/>
           </a:bodyPr>
           <a:lstStyle/>
@@ -9673,7 +10759,7 @@
       </p:sp>
       <p:sp>
         <p:nvSpPr>
-          <p:cNvPr id="12" name="Rectangle 11"/>
+          <p:cNvPr id="12" name="Rounded Rectangle 11"/>
           <p:cNvSpPr/>
           <p:nvPr/>
         </p:nvSpPr>
@@ -9682,7 +10768,7 @@
             <a:off x="7315200" y="4206240"/>
             <a:ext cx="2926080" cy="1097280"/>
           </a:xfrm>
-          <a:prstGeom prst="rect">
+          <a:prstGeom prst="roundRect">
             <a:avLst/>
           </a:prstGeom>
           <a:solidFill>
@@ -9734,7 +10820,7 @@
           <a:noFill/>
         </p:spPr>
         <p:txBody>
-          <a:bodyPr wrap="square" anchor="t">
+          <a:bodyPr wrap="square">
             <a:spAutoFit/>
           </a:bodyPr>
           <a:lstStyle/>
@@ -9770,7 +10856,7 @@
           <a:noFill/>
         </p:spPr>
         <p:txBody>
-          <a:bodyPr wrap="square" anchor="t">
+          <a:bodyPr wrap="square">
             <a:spAutoFit/>
           </a:bodyPr>
           <a:lstStyle/>
@@ -9850,7 +10936,7 @@
           <a:noFill/>
         </p:spPr>
         <p:txBody>
-          <a:bodyPr wrap="square" anchor="t">
+          <a:bodyPr wrap="square">
             <a:spAutoFit/>
           </a:bodyPr>
           <a:lstStyle/>
@@ -9930,7 +11016,7 @@
           <a:noFill/>
         </p:spPr>
         <p:txBody>
-          <a:bodyPr wrap="square" anchor="t">
+          <a:bodyPr wrap="square">
             <a:spAutoFit/>
           </a:bodyPr>
           <a:lstStyle/>
@@ -9966,7 +11052,7 @@
           <a:noFill/>
         </p:spPr>
         <p:txBody>
-          <a:bodyPr wrap="square" anchor="t">
+          <a:bodyPr wrap="square">
             <a:spAutoFit/>
           </a:bodyPr>
           <a:lstStyle/>
@@ -10002,7 +11088,7 @@
           <a:noFill/>
         </p:spPr>
         <p:txBody>
-          <a:bodyPr wrap="square" anchor="t">
+          <a:bodyPr wrap="square">
             <a:spAutoFit/>
           </a:bodyPr>
           <a:lstStyle/>
@@ -10100,7 +11186,7 @@
           <a:noFill/>
         </p:spPr>
         <p:txBody>
-          <a:bodyPr wrap="square" anchor="t">
+          <a:bodyPr wrap="square">
             <a:spAutoFit/>
           </a:bodyPr>
           <a:lstStyle/>
@@ -10180,7 +11266,7 @@
           <a:noFill/>
         </p:spPr>
         <p:txBody>
-          <a:bodyPr wrap="square" anchor="t">
+          <a:bodyPr wrap="square">
             <a:spAutoFit/>
           </a:bodyPr>
           <a:lstStyle/>
@@ -10201,7 +11287,7 @@
       </p:sp>
       <p:sp>
         <p:nvSpPr>
-          <p:cNvPr id="6" name="Rectangle 5"/>
+          <p:cNvPr id="6" name="Rounded Rectangle 5"/>
           <p:cNvSpPr/>
           <p:nvPr/>
         </p:nvSpPr>
@@ -10210,7 +11296,7 @@
             <a:off x="822960" y="1645920"/>
             <a:ext cx="10515600" cy="1280160"/>
           </a:xfrm>
-          <a:prstGeom prst="rect">
+          <a:prstGeom prst="roundRect">
             <a:avLst/>
           </a:prstGeom>
           <a:solidFill>
@@ -10262,7 +11348,7 @@
           <a:noFill/>
         </p:spPr>
         <p:txBody>
-          <a:bodyPr wrap="square" anchor="t">
+          <a:bodyPr wrap="square">
             <a:spAutoFit/>
           </a:bodyPr>
           <a:lstStyle/>
@@ -10298,7 +11384,7 @@
           <a:noFill/>
         </p:spPr>
         <p:txBody>
-          <a:bodyPr wrap="square" anchor="t">
+          <a:bodyPr wrap="square">
             <a:spAutoFit/>
           </a:bodyPr>
           <a:lstStyle/>
@@ -10334,7 +11420,7 @@
           <a:noFill/>
         </p:spPr>
         <p:txBody>
-          <a:bodyPr wrap="square" anchor="t">
+          <a:bodyPr wrap="square">
             <a:spAutoFit/>
           </a:bodyPr>
           <a:lstStyle/>
@@ -10355,7 +11441,7 @@
       </p:sp>
       <p:sp>
         <p:nvSpPr>
-          <p:cNvPr id="10" name="Rectangle 9"/>
+          <p:cNvPr id="10" name="Rounded Rectangle 9"/>
           <p:cNvSpPr/>
           <p:nvPr/>
         </p:nvSpPr>
@@ -10364,7 +11450,7 @@
             <a:off x="822960" y="3200400"/>
             <a:ext cx="10515600" cy="1280160"/>
           </a:xfrm>
-          <a:prstGeom prst="rect">
+          <a:prstGeom prst="roundRect">
             <a:avLst/>
           </a:prstGeom>
           <a:solidFill>
@@ -10416,7 +11502,7 @@
           <a:noFill/>
         </p:spPr>
         <p:txBody>
-          <a:bodyPr wrap="square" anchor="t">
+          <a:bodyPr wrap="square">
             <a:spAutoFit/>
           </a:bodyPr>
           <a:lstStyle/>
@@ -10452,7 +11538,7 @@
           <a:noFill/>
         </p:spPr>
         <p:txBody>
-          <a:bodyPr wrap="square" anchor="t">
+          <a:bodyPr wrap="square">
             <a:spAutoFit/>
           </a:bodyPr>
           <a:lstStyle/>
@@ -10488,7 +11574,7 @@
           <a:noFill/>
         </p:spPr>
         <p:txBody>
-          <a:bodyPr wrap="square" anchor="t">
+          <a:bodyPr wrap="square">
             <a:spAutoFit/>
           </a:bodyPr>
           <a:lstStyle/>
@@ -10509,7 +11595,7 @@
       </p:sp>
       <p:sp>
         <p:nvSpPr>
-          <p:cNvPr id="14" name="Rectangle 13"/>
+          <p:cNvPr id="14" name="Rounded Rectangle 13"/>
           <p:cNvSpPr/>
           <p:nvPr/>
         </p:nvSpPr>
@@ -10518,13 +11604,13 @@
             <a:off x="822960" y="4754880"/>
             <a:ext cx="10515600" cy="914400"/>
           </a:xfrm>
-          <a:prstGeom prst="rect">
+          <a:prstGeom prst="roundRect">
             <a:avLst/>
           </a:prstGeom>
           <a:solidFill>
             <a:srgbClr val="0B1F33"/>
           </a:solidFill>
-          <a:ln w="12700">
+          <a:ln w="19050">
             <a:solidFill>
               <a:srgbClr val="FFB74D"/>
             </a:solidFill>
@@ -10570,7 +11656,7 @@
           <a:noFill/>
         </p:spPr>
         <p:txBody>
-          <a:bodyPr wrap="square" anchor="t">
+          <a:bodyPr wrap="square">
             <a:spAutoFit/>
           </a:bodyPr>
           <a:lstStyle/>
@@ -10606,7 +11692,7 @@
           <a:noFill/>
         </p:spPr>
         <p:txBody>
-          <a:bodyPr wrap="square" anchor="t">
+          <a:bodyPr wrap="square">
             <a:spAutoFit/>
           </a:bodyPr>
           <a:lstStyle/>
@@ -10642,7 +11728,7 @@
           <a:noFill/>
         </p:spPr>
         <p:txBody>
-          <a:bodyPr wrap="square" anchor="t">
+          <a:bodyPr wrap="square">
             <a:spAutoFit/>
           </a:bodyPr>
           <a:lstStyle/>
@@ -10740,7 +11826,7 @@
           <a:noFill/>
         </p:spPr>
         <p:txBody>
-          <a:bodyPr wrap="square" anchor="t">
+          <a:bodyPr wrap="square">
             <a:spAutoFit/>
           </a:bodyPr>
           <a:lstStyle/>
@@ -10820,7 +11906,7 @@
           <a:noFill/>
         </p:spPr>
         <p:txBody>
-          <a:bodyPr wrap="square" anchor="t">
+          <a:bodyPr wrap="square">
             <a:spAutoFit/>
           </a:bodyPr>
           <a:lstStyle/>
@@ -10841,16 +11927,16 @@
       </p:sp>
       <p:sp>
         <p:nvSpPr>
-          <p:cNvPr id="6" name="Rectangle 5"/>
+          <p:cNvPr id="6" name="Rounded Rectangle 5"/>
           <p:cNvSpPr/>
           <p:nvPr/>
         </p:nvSpPr>
         <p:spPr>
           <a:xfrm>
-            <a:off x="822960" y="1737360"/>
-            <a:ext cx="5943600" cy="914400"/>
-          </a:xfrm>
-          <a:prstGeom prst="rect">
+            <a:off x="822960" y="1645920"/>
+            <a:ext cx="5943600" cy="1051560"/>
+          </a:xfrm>
+          <a:prstGeom prst="roundRect">
             <a:avLst/>
           </a:prstGeom>
           <a:solidFill>
@@ -10893,16 +11979,16 @@
         </p:nvSpPr>
         <p:spPr>
           <a:xfrm>
-            <a:off x="1097280" y="1874519"/>
-            <a:ext cx="5394960" cy="365760"/>
-          </a:xfrm>
-          <a:prstGeom prst="rect">
-            <a:avLst/>
-          </a:prstGeom>
-          <a:noFill/>
-        </p:spPr>
-        <p:txBody>
-          <a:bodyPr wrap="square" anchor="t">
+            <a:off x="1097280" y="1783080"/>
+            <a:ext cx="5486400" cy="365760"/>
+          </a:xfrm>
+          <a:prstGeom prst="rect">
+            <a:avLst/>
+          </a:prstGeom>
+          <a:noFill/>
+        </p:spPr>
+        <p:txBody>
+          <a:bodyPr wrap="square">
             <a:spAutoFit/>
           </a:bodyPr>
           <a:lstStyle/>
@@ -10929,30 +12015,30 @@
         </p:nvSpPr>
         <p:spPr>
           <a:xfrm>
-            <a:off x="1097280" y="2240280"/>
-            <a:ext cx="5394960" cy="365760"/>
-          </a:xfrm>
-          <a:prstGeom prst="rect">
-            <a:avLst/>
-          </a:prstGeom>
-          <a:noFill/>
-        </p:spPr>
-        <p:txBody>
-          <a:bodyPr wrap="square" anchor="t">
-            <a:spAutoFit/>
-          </a:bodyPr>
-          <a:lstStyle/>
-          <a:p>
-            <a:pPr algn="l"/>
-            <a:r>
-              <a:rPr sz="1400" b="0">
+            <a:off x="1097280" y="2194560"/>
+            <a:ext cx="5486400" cy="457200"/>
+          </a:xfrm>
+          <a:prstGeom prst="rect">
+            <a:avLst/>
+          </a:prstGeom>
+          <a:noFill/>
+        </p:spPr>
+        <p:txBody>
+          <a:bodyPr wrap="square">
+            <a:spAutoFit/>
+          </a:bodyPr>
+          <a:lstStyle/>
+          <a:p>
+            <a:pPr algn="l"/>
+            <a:r>
+              <a:rPr sz="1300" b="0">
                 <a:solidFill>
                   <a:srgbClr val="8FB0D4"/>
                 </a:solidFill>
                 <a:latin typeface="Microsoft YaHei"/>
                 <a:ea typeface="Microsoft YaHei"/>
               </a:rPr>
-              <a:t>参数校验 · 调用 service · 统一响应</a:t>
+              <a:t>解析请求 · 参数校验 · 调用 service · 统一响应 {code,message,data} · 不写业务逻辑</a:t>
             </a:r>
           </a:p>
         </p:txBody>
@@ -10965,7 +12051,7 @@
         </p:nvSpPr>
         <p:spPr>
           <a:xfrm>
-            <a:off x="3108960" y="2697480"/>
+            <a:off x="3108960" y="2743200"/>
             <a:ext cx="548640" cy="228600"/>
           </a:xfrm>
           <a:prstGeom prst="rightArrow">
@@ -11003,16 +12089,16 @@
       </p:sp>
       <p:sp>
         <p:nvSpPr>
-          <p:cNvPr id="10" name="Rectangle 9"/>
+          <p:cNvPr id="10" name="Rounded Rectangle 9"/>
           <p:cNvSpPr/>
           <p:nvPr/>
         </p:nvSpPr>
         <p:spPr>
           <a:xfrm>
-            <a:off x="822960" y="2834639"/>
-            <a:ext cx="5943600" cy="914400"/>
-          </a:xfrm>
-          <a:prstGeom prst="rect">
+            <a:off x="822960" y="2880360"/>
+            <a:ext cx="5943600" cy="1051560"/>
+          </a:xfrm>
+          <a:prstGeom prst="roundRect">
             <a:avLst/>
           </a:prstGeom>
           <a:solidFill>
@@ -11055,16 +12141,16 @@
         </p:nvSpPr>
         <p:spPr>
           <a:xfrm>
-            <a:off x="1097280" y="2971799"/>
-            <a:ext cx="5394960" cy="365760"/>
-          </a:xfrm>
-          <a:prstGeom prst="rect">
-            <a:avLst/>
-          </a:prstGeom>
-          <a:noFill/>
-        </p:spPr>
-        <p:txBody>
-          <a:bodyPr wrap="square" anchor="t">
+            <a:off x="1097280" y="3017520"/>
+            <a:ext cx="5486400" cy="365760"/>
+          </a:xfrm>
+          <a:prstGeom prst="rect">
+            <a:avLst/>
+          </a:prstGeom>
+          <a:noFill/>
+        </p:spPr>
+        <p:txBody>
+          <a:bodyPr wrap="square">
             <a:spAutoFit/>
           </a:bodyPr>
           <a:lstStyle/>
@@ -11091,30 +12177,30 @@
         </p:nvSpPr>
         <p:spPr>
           <a:xfrm>
-            <a:off x="1097280" y="3337559"/>
-            <a:ext cx="5394960" cy="365760"/>
-          </a:xfrm>
-          <a:prstGeom prst="rect">
-            <a:avLst/>
-          </a:prstGeom>
-          <a:noFill/>
-        </p:spPr>
-        <p:txBody>
-          <a:bodyPr wrap="square" anchor="t">
-            <a:spAutoFit/>
-          </a:bodyPr>
-          <a:lstStyle/>
-          <a:p>
-            <a:pPr algn="l"/>
-            <a:r>
-              <a:rPr sz="1400" b="0">
+            <a:off x="1097280" y="3429000"/>
+            <a:ext cx="5486400" cy="457200"/>
+          </a:xfrm>
+          <a:prstGeom prst="rect">
+            <a:avLst/>
+          </a:prstGeom>
+          <a:noFill/>
+        </p:spPr>
+        <p:txBody>
+          <a:bodyPr wrap="square">
+            <a:spAutoFit/>
+          </a:bodyPr>
+          <a:lstStyle/>
+          <a:p>
+            <a:pPr algn="l"/>
+            <a:r>
+              <a:rPr sz="1300" b="0">
                 <a:solidFill>
                   <a:srgbClr val="8FB0D4"/>
                 </a:solidFill>
                 <a:latin typeface="Microsoft YaHei"/>
                 <a:ea typeface="Microsoft YaHei"/>
               </a:rPr>
-              <a:t>业务规则 · 编排 · 事务管理</a:t>
+              <a:t>业务规则 · 编排 · 事务管理 · 归属校验 · 抛 AppError 业务异常</a:t>
             </a:r>
           </a:p>
         </p:txBody>
@@ -11127,7 +12213,7 @@
         </p:nvSpPr>
         <p:spPr>
           <a:xfrm>
-            <a:off x="3108960" y="3794759"/>
+            <a:off x="3108960" y="3977640"/>
             <a:ext cx="548640" cy="228600"/>
           </a:xfrm>
           <a:prstGeom prst="rightArrow">
@@ -11165,16 +12251,16 @@
       </p:sp>
       <p:sp>
         <p:nvSpPr>
-          <p:cNvPr id="14" name="Rectangle 13"/>
+          <p:cNvPr id="14" name="Rounded Rectangle 13"/>
           <p:cNvSpPr/>
           <p:nvPr/>
         </p:nvSpPr>
         <p:spPr>
           <a:xfrm>
-            <a:off x="822960" y="3931920"/>
-            <a:ext cx="5943600" cy="914400"/>
-          </a:xfrm>
-          <a:prstGeom prst="rect">
+            <a:off x="822960" y="4114800"/>
+            <a:ext cx="5943600" cy="1051560"/>
+          </a:xfrm>
+          <a:prstGeom prst="roundRect">
             <a:avLst/>
           </a:prstGeom>
           <a:solidFill>
@@ -11217,16 +12303,16 @@
         </p:nvSpPr>
         <p:spPr>
           <a:xfrm>
-            <a:off x="1097280" y="4069080"/>
-            <a:ext cx="5394960" cy="365760"/>
-          </a:xfrm>
-          <a:prstGeom prst="rect">
-            <a:avLst/>
-          </a:prstGeom>
-          <a:noFill/>
-        </p:spPr>
-        <p:txBody>
-          <a:bodyPr wrap="square" anchor="t">
+            <a:off x="1097280" y="4251960"/>
+            <a:ext cx="5486400" cy="365760"/>
+          </a:xfrm>
+          <a:prstGeom prst="rect">
+            <a:avLst/>
+          </a:prstGeom>
+          <a:noFill/>
+        </p:spPr>
+        <p:txBody>
+          <a:bodyPr wrap="square">
             <a:spAutoFit/>
           </a:bodyPr>
           <a:lstStyle/>
@@ -11253,46 +12339,46 @@
         </p:nvSpPr>
         <p:spPr>
           <a:xfrm>
-            <a:off x="1097280" y="4434840"/>
-            <a:ext cx="5394960" cy="365760"/>
-          </a:xfrm>
-          <a:prstGeom prst="rect">
-            <a:avLst/>
-          </a:prstGeom>
-          <a:noFill/>
-        </p:spPr>
-        <p:txBody>
-          <a:bodyPr wrap="square" anchor="t">
-            <a:spAutoFit/>
-          </a:bodyPr>
-          <a:lstStyle/>
-          <a:p>
-            <a:pPr algn="l"/>
-            <a:r>
-              <a:rPr sz="1400" b="0">
+            <a:off x="1097280" y="4663440"/>
+            <a:ext cx="5486400" cy="457200"/>
+          </a:xfrm>
+          <a:prstGeom prst="rect">
+            <a:avLst/>
+          </a:prstGeom>
+          <a:noFill/>
+        </p:spPr>
+        <p:txBody>
+          <a:bodyPr wrap="square">
+            <a:spAutoFit/>
+          </a:bodyPr>
+          <a:lstStyle/>
+          <a:p>
+            <a:pPr algn="l"/>
+            <a:r>
+              <a:rPr sz="1300" b="0">
                 <a:solidFill>
                   <a:srgbClr val="8FB0D4"/>
                 </a:solidFill>
                 <a:latin typeface="Microsoft YaHei"/>
                 <a:ea typeface="Microsoft YaHei"/>
               </a:rPr>
-              <a:t>数据库读写 · 隔离 SQLite 可替换</a:t>
-            </a:r>
-          </a:p>
-        </p:txBody>
-      </p:sp>
-      <p:sp>
-        <p:nvSpPr>
-          <p:cNvPr id="17" name="Rectangle 16"/>
+              <a:t>SQLAlchemy 查询 · 增删改查 · 隔离 SQLite 可替换 PostgreSQL</a:t>
+            </a:r>
+          </a:p>
+        </p:txBody>
+      </p:sp>
+      <p:sp>
+        <p:nvSpPr>
+          <p:cNvPr id="17" name="Rounded Rectangle 16"/>
           <p:cNvSpPr/>
           <p:nvPr/>
         </p:nvSpPr>
         <p:spPr>
           <a:xfrm>
-            <a:off x="7223760" y="1737360"/>
-            <a:ext cx="4206240" cy="2926080"/>
-          </a:xfrm>
-          <a:prstGeom prst="rect">
+            <a:off x="7223760" y="1645920"/>
+            <a:ext cx="4206240" cy="3657600"/>
+          </a:xfrm>
+          <a:prstGeom prst="roundRect">
             <a:avLst/>
           </a:prstGeom>
           <a:solidFill>
@@ -11335,7 +12421,7 @@
         </p:nvSpPr>
         <p:spPr>
           <a:xfrm>
-            <a:off x="7498079" y="1920240"/>
+            <a:off x="7498079" y="1828800"/>
             <a:ext cx="3657600" cy="457200"/>
           </a:xfrm>
           <a:prstGeom prst="rect">
@@ -11344,7 +12430,7 @@
           <a:noFill/>
         </p:spPr>
         <p:txBody>
-          <a:bodyPr wrap="square" anchor="t">
+          <a:bodyPr wrap="square">
             <a:spAutoFit/>
           </a:bodyPr>
           <a:lstStyle/>
@@ -11371,32 +12457,30 @@
         </p:nvSpPr>
         <p:spPr>
           <a:xfrm>
-            <a:off x="7498079" y="2468880"/>
-            <a:ext cx="3657600" cy="1828800"/>
-          </a:xfrm>
-          <a:prstGeom prst="rect">
-            <a:avLst/>
-          </a:prstGeom>
-          <a:noFill/>
-        </p:spPr>
-        <p:txBody>
-          <a:bodyPr wrap="square" anchor="t">
-            <a:spAutoFit/>
-          </a:bodyPr>
-          <a:lstStyle/>
-          <a:p>
-            <a:pPr algn="l"/>
-            <a:r>
-              <a:rPr sz="1600" b="0">
+            <a:off x="7498079" y="2377440"/>
+            <a:ext cx="3657600" cy="365760"/>
+          </a:xfrm>
+          <a:prstGeom prst="rect">
+            <a:avLst/>
+          </a:prstGeom>
+          <a:noFill/>
+        </p:spPr>
+        <p:txBody>
+          <a:bodyPr wrap="square">
+            <a:spAutoFit/>
+          </a:bodyPr>
+          <a:lstStyle/>
+          <a:p>
+            <a:pPr algn="l"/>
+            <a:r>
+              <a:rPr sz="1400" b="0">
                 <a:solidFill>
                   <a:srgbClr val="D6E4F5"/>
                 </a:solidFill>
                 <a:latin typeface="Consolas"/>
                 <a:ea typeface="Consolas"/>
               </a:rPr>
-              <a:t>core · users · questions
-engine · templates
-interviews · reports</a:t>
+              <a:t>core  配置·数据库·异常</a:t>
             </a:r>
           </a:p>
         </p:txBody>
@@ -11409,16 +12493,232 @@
         </p:nvSpPr>
         <p:spPr>
           <a:xfrm>
-            <a:off x="822960" y="5212080"/>
-            <a:ext cx="10515600" cy="731520"/>
-          </a:xfrm>
-          <a:prstGeom prst="rect">
-            <a:avLst/>
-          </a:prstGeom>
-          <a:noFill/>
-        </p:spPr>
-        <p:txBody>
-          <a:bodyPr wrap="square" anchor="t">
+            <a:off x="7498079" y="2798064"/>
+            <a:ext cx="3657600" cy="365760"/>
+          </a:xfrm>
+          <a:prstGeom prst="rect">
+            <a:avLst/>
+          </a:prstGeom>
+          <a:noFill/>
+        </p:spPr>
+        <p:txBody>
+          <a:bodyPr wrap="square">
+            <a:spAutoFit/>
+          </a:bodyPr>
+          <a:lstStyle/>
+          <a:p>
+            <a:pPr algn="l"/>
+            <a:r>
+              <a:rPr sz="1400" b="0">
+                <a:solidFill>
+                  <a:srgbClr val="D6E4F5"/>
+                </a:solidFill>
+                <a:latin typeface="Consolas"/>
+                <a:ea typeface="Consolas"/>
+              </a:rPr>
+              <a:t>users  Bearer 认证</a:t>
+            </a:r>
+          </a:p>
+        </p:txBody>
+      </p:sp>
+      <p:sp>
+        <p:nvSpPr>
+          <p:cNvPr id="21" name="TextBox 20"/>
+          <p:cNvSpPr txBox="1"/>
+          <p:nvPr/>
+        </p:nvSpPr>
+        <p:spPr>
+          <a:xfrm>
+            <a:off x="7498079" y="3218688"/>
+            <a:ext cx="3657600" cy="365760"/>
+          </a:xfrm>
+          <a:prstGeom prst="rect">
+            <a:avLst/>
+          </a:prstGeom>
+          <a:noFill/>
+        </p:spPr>
+        <p:txBody>
+          <a:bodyPr wrap="square">
+            <a:spAutoFit/>
+          </a:bodyPr>
+          <a:lstStyle/>
+          <a:p>
+            <a:pPr algn="l"/>
+            <a:r>
+              <a:rPr sz="1400" b="0">
+                <a:solidFill>
+                  <a:srgbClr val="D6E4F5"/>
+                </a:solidFill>
+                <a:latin typeface="Consolas"/>
+                <a:ea typeface="Consolas"/>
+              </a:rPr>
+              <a:t>questions  题库·种子</a:t>
+            </a:r>
+          </a:p>
+        </p:txBody>
+      </p:sp>
+      <p:sp>
+        <p:nvSpPr>
+          <p:cNvPr id="22" name="TextBox 21"/>
+          <p:cNvSpPr txBox="1"/>
+          <p:nvPr/>
+        </p:nvSpPr>
+        <p:spPr>
+          <a:xfrm>
+            <a:off x="7498079" y="3639312"/>
+            <a:ext cx="3657600" cy="365760"/>
+          </a:xfrm>
+          <a:prstGeom prst="rect">
+            <a:avLst/>
+          </a:prstGeom>
+          <a:noFill/>
+        </p:spPr>
+        <p:txBody>
+          <a:bodyPr wrap="square">
+            <a:spAutoFit/>
+          </a:bodyPr>
+          <a:lstStyle/>
+          <a:p>
+            <a:pPr algn="l"/>
+            <a:r>
+              <a:rPr sz="1400" b="0">
+                <a:solidFill>
+                  <a:srgbClr val="D6E4F5"/>
+                </a:solidFill>
+                <a:latin typeface="Consolas"/>
+                <a:ea typeface="Consolas"/>
+              </a:rPr>
+              <a:t>engine  InterviewEngine</a:t>
+            </a:r>
+          </a:p>
+        </p:txBody>
+      </p:sp>
+      <p:sp>
+        <p:nvSpPr>
+          <p:cNvPr id="23" name="TextBox 22"/>
+          <p:cNvSpPr txBox="1"/>
+          <p:nvPr/>
+        </p:nvSpPr>
+        <p:spPr>
+          <a:xfrm>
+            <a:off x="7498079" y="4059936"/>
+            <a:ext cx="3657600" cy="365760"/>
+          </a:xfrm>
+          <a:prstGeom prst="rect">
+            <a:avLst/>
+          </a:prstGeom>
+          <a:noFill/>
+        </p:spPr>
+        <p:txBody>
+          <a:bodyPr wrap="square">
+            <a:spAutoFit/>
+          </a:bodyPr>
+          <a:lstStyle/>
+          <a:p>
+            <a:pPr algn="l"/>
+            <a:r>
+              <a:rPr sz="1400" b="0">
+                <a:solidFill>
+                  <a:srgbClr val="D6E4F5"/>
+                </a:solidFill>
+                <a:latin typeface="Consolas"/>
+                <a:ea typeface="Consolas"/>
+              </a:rPr>
+              <a:t>templates  预设模板</a:t>
+            </a:r>
+          </a:p>
+        </p:txBody>
+      </p:sp>
+      <p:sp>
+        <p:nvSpPr>
+          <p:cNvPr id="24" name="TextBox 23"/>
+          <p:cNvSpPr txBox="1"/>
+          <p:nvPr/>
+        </p:nvSpPr>
+        <p:spPr>
+          <a:xfrm>
+            <a:off x="7498079" y="4480560"/>
+            <a:ext cx="3657600" cy="365760"/>
+          </a:xfrm>
+          <a:prstGeom prst="rect">
+            <a:avLst/>
+          </a:prstGeom>
+          <a:noFill/>
+        </p:spPr>
+        <p:txBody>
+          <a:bodyPr wrap="square">
+            <a:spAutoFit/>
+          </a:bodyPr>
+          <a:lstStyle/>
+          <a:p>
+            <a:pPr algn="l"/>
+            <a:r>
+              <a:rPr sz="1400" b="0">
+                <a:solidFill>
+                  <a:srgbClr val="D6E4F5"/>
+                </a:solidFill>
+                <a:latin typeface="Consolas"/>
+                <a:ea typeface="Consolas"/>
+              </a:rPr>
+              <a:t>interviews  会话·状态机</a:t>
+            </a:r>
+          </a:p>
+        </p:txBody>
+      </p:sp>
+      <p:sp>
+        <p:nvSpPr>
+          <p:cNvPr id="25" name="TextBox 24"/>
+          <p:cNvSpPr txBox="1"/>
+          <p:nvPr/>
+        </p:nvSpPr>
+        <p:spPr>
+          <a:xfrm>
+            <a:off x="7498079" y="4901184"/>
+            <a:ext cx="3657600" cy="365760"/>
+          </a:xfrm>
+          <a:prstGeom prst="rect">
+            <a:avLst/>
+          </a:prstGeom>
+          <a:noFill/>
+        </p:spPr>
+        <p:txBody>
+          <a:bodyPr wrap="square">
+            <a:spAutoFit/>
+          </a:bodyPr>
+          <a:lstStyle/>
+          <a:p>
+            <a:pPr algn="l"/>
+            <a:r>
+              <a:rPr sz="1400" b="0">
+                <a:solidFill>
+                  <a:srgbClr val="D6E4F5"/>
+                </a:solidFill>
+                <a:latin typeface="Consolas"/>
+                <a:ea typeface="Consolas"/>
+              </a:rPr>
+              <a:t>reports  惰性报告</a:t>
+            </a:r>
+          </a:p>
+        </p:txBody>
+      </p:sp>
+      <p:sp>
+        <p:nvSpPr>
+          <p:cNvPr id="26" name="TextBox 25"/>
+          <p:cNvSpPr txBox="1"/>
+          <p:nvPr/>
+        </p:nvSpPr>
+        <p:spPr>
+          <a:xfrm>
+            <a:off x="822960" y="5486400"/>
+            <a:ext cx="10515600" cy="640080"/>
+          </a:xfrm>
+          <a:prstGeom prst="rect">
+            <a:avLst/>
+          </a:prstGeom>
+          <a:noFill/>
+        </p:spPr>
+        <p:txBody>
+          <a:bodyPr wrap="square">
             <a:spAutoFit/>
           </a:bodyPr>
           <a:lstStyle/>
@@ -11427,12 +12727,12 @@
             <a:r>
               <a:rPr sz="1600" b="0">
                 <a:solidFill>
-                  <a:srgbClr val="C9DFF0"/>
+                  <a:srgbClr val="FFB74D"/>
                 </a:solidFill>
                 <a:latin typeface="Microsoft YaHei"/>
                 <a:ea typeface="Microsoft YaHei"/>
               </a:rPr>
-              <a:t>engine 抽象：InterviewEngine 接口，上层只依赖接口，可零改动替换为真实大模型</a:t>
+              <a:t>engine 抽象：上层只依赖 InterviewEngine 接口，可零改动替换为真实大模型实现</a:t>
             </a:r>
           </a:p>
         </p:txBody>
@@ -11516,7 +12816,7 @@
           <a:noFill/>
         </p:spPr>
         <p:txBody>
-          <a:bodyPr wrap="square" anchor="t">
+          <a:bodyPr wrap="square">
             <a:spAutoFit/>
           </a:bodyPr>
           <a:lstStyle/>
@@ -11596,7 +12896,7 @@
           <a:noFill/>
         </p:spPr>
         <p:txBody>
-          <a:bodyPr wrap="square" anchor="t">
+          <a:bodyPr wrap="square">
             <a:spAutoFit/>
           </a:bodyPr>
           <a:lstStyle/>
@@ -11617,16 +12917,16 @@
       </p:sp>
       <p:sp>
         <p:nvSpPr>
-          <p:cNvPr id="6" name="Rectangle 5"/>
+          <p:cNvPr id="6" name="Rounded Rectangle 5"/>
           <p:cNvSpPr/>
           <p:nvPr/>
         </p:nvSpPr>
         <p:spPr>
           <a:xfrm>
-            <a:off x="822960" y="1737360"/>
-            <a:ext cx="5120640" cy="4206240"/>
-          </a:xfrm>
-          <a:prstGeom prst="rect">
+            <a:off x="822960" y="1645920"/>
+            <a:ext cx="5303520" cy="4480560"/>
+          </a:xfrm>
+          <a:prstGeom prst="roundRect">
             <a:avLst/>
           </a:prstGeom>
           <a:solidFill>
@@ -11669,16 +12969,16 @@
         </p:nvSpPr>
         <p:spPr>
           <a:xfrm>
-            <a:off x="1097280" y="1920240"/>
-            <a:ext cx="4572000" cy="457200"/>
-          </a:xfrm>
-          <a:prstGeom prst="rect">
-            <a:avLst/>
-          </a:prstGeom>
-          <a:noFill/>
-        </p:spPr>
-        <p:txBody>
-          <a:bodyPr wrap="square" anchor="t">
+            <a:off x="1097280" y="1828800"/>
+            <a:ext cx="4754880" cy="457200"/>
+          </a:xfrm>
+          <a:prstGeom prst="rect">
+            <a:avLst/>
+          </a:prstGeom>
+          <a:noFill/>
+        </p:spPr>
+        <p:txBody>
+          <a:bodyPr wrap="square">
             <a:spAutoFit/>
           </a:bodyPr>
           <a:lstStyle/>
@@ -11692,7 +12992,7 @@
                 <a:latin typeface="Microsoft YaHei"/>
                 <a:ea typeface="Microsoft YaHei"/>
               </a:rPr>
-              <a:t>核心机制</a:t>
+              <a:t>InterviewEngine 接口（Protocol）</a:t>
             </a:r>
           </a:p>
         </p:txBody>
@@ -11705,16 +13005,16 @@
         </p:nvSpPr>
         <p:spPr>
           <a:xfrm>
-            <a:off x="1097280" y="2468880"/>
-            <a:ext cx="4572000" cy="3291840"/>
-          </a:xfrm>
-          <a:prstGeom prst="rect">
-            <a:avLst/>
-          </a:prstGeom>
-          <a:noFill/>
-        </p:spPr>
-        <p:txBody>
-          <a:bodyPr wrap="square" anchor="t">
+            <a:off x="1097280" y="2331720"/>
+            <a:ext cx="4754880" cy="365760"/>
+          </a:xfrm>
+          <a:prstGeom prst="rect">
+            <a:avLst/>
+          </a:prstGeom>
+          <a:noFill/>
+        </p:spPr>
+        <p:txBody>
+          <a:bodyPr wrap="square">
             <a:spAutoFit/>
           </a:bodyPr>
           <a:lstStyle/>
@@ -11728,31 +13028,347 @@
                 <a:latin typeface="Consolas"/>
                 <a:ea typeface="Consolas"/>
               </a:rPr>
-              <a:t>InterviewEngine 接口
-  draw_questions(...)
-  evaluate_answer(...)
-RuleBasedEngine 实现
-  按方向+题型随机抽题
-  关键词命中生成点评
-questions 题库
-  120 题种子数据
-  seed_if_empty 幂等导入</a:t>
-            </a:r>
-          </a:p>
-        </p:txBody>
-      </p:sp>
-      <p:sp>
-        <p:nvSpPr>
-          <p:cNvPr id="9" name="Rectangle 8"/>
+              <a:t>draw_questions(db, direction, segments)</a:t>
+            </a:r>
+          </a:p>
+        </p:txBody>
+      </p:sp>
+      <p:sp>
+        <p:nvSpPr>
+          <p:cNvPr id="9" name="TextBox 8"/>
+          <p:cNvSpPr txBox="1"/>
+          <p:nvPr/>
+        </p:nvSpPr>
+        <p:spPr>
+          <a:xfrm>
+            <a:off x="1280160" y="2697480"/>
+            <a:ext cx="4572000" cy="365760"/>
+          </a:xfrm>
+          <a:prstGeom prst="rect">
+            <a:avLst/>
+          </a:prstGeom>
+          <a:noFill/>
+        </p:spPr>
+        <p:txBody>
+          <a:bodyPr wrap="square">
+            <a:spAutoFit/>
+          </a:bodyPr>
+          <a:lstStyle/>
+          <a:p>
+            <a:pPr algn="l"/>
+            <a:r>
+              <a:rPr sz="1300" b="0">
+                <a:solidFill>
+                  <a:srgbClr val="8FB0D4"/>
+                </a:solidFill>
+                <a:latin typeface="Microsoft YaHei"/>
+                <a:ea typeface="Microsoft YaHei"/>
+              </a:rPr>
+              <a:t>→ List[Question] 按配置抽题</a:t>
+            </a:r>
+          </a:p>
+        </p:txBody>
+      </p:sp>
+      <p:sp>
+        <p:nvSpPr>
+          <p:cNvPr id="10" name="TextBox 9"/>
+          <p:cNvSpPr txBox="1"/>
+          <p:nvPr/>
+        </p:nvSpPr>
+        <p:spPr>
+          <a:xfrm>
+            <a:off x="1097280" y="3108960"/>
+            <a:ext cx="4754880" cy="365760"/>
+          </a:xfrm>
+          <a:prstGeom prst="rect">
+            <a:avLst/>
+          </a:prstGeom>
+          <a:noFill/>
+        </p:spPr>
+        <p:txBody>
+          <a:bodyPr wrap="square">
+            <a:spAutoFit/>
+          </a:bodyPr>
+          <a:lstStyle/>
+          <a:p>
+            <a:pPr algn="l"/>
+            <a:r>
+              <a:rPr sz="1400" b="0">
+                <a:solidFill>
+                  <a:srgbClr val="D6E4F5"/>
+                </a:solidFill>
+                <a:latin typeface="Consolas"/>
+                <a:ea typeface="Consolas"/>
+              </a:rPr>
+              <a:t>evaluate_answer(question, answer)</a:t>
+            </a:r>
+          </a:p>
+        </p:txBody>
+      </p:sp>
+      <p:sp>
+        <p:nvSpPr>
+          <p:cNvPr id="11" name="TextBox 10"/>
+          <p:cNvSpPr txBox="1"/>
+          <p:nvPr/>
+        </p:nvSpPr>
+        <p:spPr>
+          <a:xfrm>
+            <a:off x="1280160" y="3474720"/>
+            <a:ext cx="4572000" cy="365760"/>
+          </a:xfrm>
+          <a:prstGeom prst="rect">
+            <a:avLst/>
+          </a:prstGeom>
+          <a:noFill/>
+        </p:spPr>
+        <p:txBody>
+          <a:bodyPr wrap="square">
+            <a:spAutoFit/>
+          </a:bodyPr>
+          <a:lstStyle/>
+          <a:p>
+            <a:pPr algn="l"/>
+            <a:r>
+              <a:rPr sz="1300" b="0">
+                <a:solidFill>
+                  <a:srgbClr val="8FB0D4"/>
+                </a:solidFill>
+                <a:latin typeface="Microsoft YaHei"/>
+                <a:ea typeface="Microsoft YaHei"/>
+              </a:rPr>
+              <a:t>→ str 生成单题点评</a:t>
+            </a:r>
+          </a:p>
+        </p:txBody>
+      </p:sp>
+      <p:sp>
+        <p:nvSpPr>
+          <p:cNvPr id="12" name="TextBox 11"/>
+          <p:cNvSpPr txBox="1"/>
+          <p:nvPr/>
+        </p:nvSpPr>
+        <p:spPr>
+          <a:xfrm>
+            <a:off x="1097280" y="3977639"/>
+            <a:ext cx="4754880" cy="457200"/>
+          </a:xfrm>
+          <a:prstGeom prst="rect">
+            <a:avLst/>
+          </a:prstGeom>
+          <a:noFill/>
+        </p:spPr>
+        <p:txBody>
+          <a:bodyPr wrap="square">
+            <a:spAutoFit/>
+          </a:bodyPr>
+          <a:lstStyle/>
+          <a:p>
+            <a:pPr algn="l"/>
+            <a:r>
+              <a:rPr sz="1800" b="1">
+                <a:solidFill>
+                  <a:srgbClr val="4FC3F7"/>
+                </a:solidFill>
+                <a:latin typeface="Microsoft YaHei"/>
+                <a:ea typeface="Microsoft YaHei"/>
+              </a:rPr>
+              <a:t>RuleBasedEngine 实现</a:t>
+            </a:r>
+          </a:p>
+        </p:txBody>
+      </p:sp>
+      <p:sp>
+        <p:nvSpPr>
+          <p:cNvPr id="13" name="TextBox 12"/>
+          <p:cNvSpPr txBox="1"/>
+          <p:nvPr/>
+        </p:nvSpPr>
+        <p:spPr>
+          <a:xfrm>
+            <a:off x="1097280" y="4480560"/>
+            <a:ext cx="4754880" cy="365760"/>
+          </a:xfrm>
+          <a:prstGeom prst="rect">
+            <a:avLst/>
+          </a:prstGeom>
+          <a:noFill/>
+        </p:spPr>
+        <p:txBody>
+          <a:bodyPr wrap="square">
+            <a:spAutoFit/>
+          </a:bodyPr>
+          <a:lstStyle/>
+          <a:p>
+            <a:pPr algn="l"/>
+            <a:r>
+              <a:rPr sz="1300" b="0">
+                <a:solidFill>
+                  <a:srgbClr val="D6E4F5"/>
+                </a:solidFill>
+                <a:latin typeface="Microsoft YaHei"/>
+                <a:ea typeface="Microsoft YaHei"/>
+              </a:rPr>
+              <a:t>· 遍历 segments 按方向+题型筛选</a:t>
+            </a:r>
+          </a:p>
+        </p:txBody>
+      </p:sp>
+      <p:sp>
+        <p:nvSpPr>
+          <p:cNvPr id="14" name="TextBox 13"/>
+          <p:cNvSpPr txBox="1"/>
+          <p:nvPr/>
+        </p:nvSpPr>
+        <p:spPr>
+          <a:xfrm>
+            <a:off x="1097280" y="4846320"/>
+            <a:ext cx="4754880" cy="365760"/>
+          </a:xfrm>
+          <a:prstGeom prst="rect">
+            <a:avLst/>
+          </a:prstGeom>
+          <a:noFill/>
+        </p:spPr>
+        <p:txBody>
+          <a:bodyPr wrap="square">
+            <a:spAutoFit/>
+          </a:bodyPr>
+          <a:lstStyle/>
+          <a:p>
+            <a:pPr algn="l"/>
+            <a:r>
+              <a:rPr sz="1300" b="0">
+                <a:solidFill>
+                  <a:srgbClr val="D6E4F5"/>
+                </a:solidFill>
+                <a:latin typeface="Microsoft YaHei"/>
+                <a:ea typeface="Microsoft YaHei"/>
+              </a:rPr>
+              <a:t>· 随机抽样不重复（rng 可注入）</a:t>
+            </a:r>
+          </a:p>
+        </p:txBody>
+      </p:sp>
+      <p:sp>
+        <p:nvSpPr>
+          <p:cNvPr id="15" name="TextBox 14"/>
+          <p:cNvSpPr txBox="1"/>
+          <p:nvPr/>
+        </p:nvSpPr>
+        <p:spPr>
+          <a:xfrm>
+            <a:off x="1097280" y="5212080"/>
+            <a:ext cx="4754880" cy="365760"/>
+          </a:xfrm>
+          <a:prstGeom prst="rect">
+            <a:avLst/>
+          </a:prstGeom>
+          <a:noFill/>
+        </p:spPr>
+        <p:txBody>
+          <a:bodyPr wrap="square">
+            <a:spAutoFit/>
+          </a:bodyPr>
+          <a:lstStyle/>
+          <a:p>
+            <a:pPr algn="l"/>
+            <a:r>
+              <a:rPr sz="1300" b="0">
+                <a:solidFill>
+                  <a:srgbClr val="D6E4F5"/>
+                </a:solidFill>
+                <a:latin typeface="Microsoft YaHei"/>
+                <a:ea typeface="Microsoft YaHei"/>
+              </a:rPr>
+              <a:t>· 题目不足抛 AppError(40004)</a:t>
+            </a:r>
+          </a:p>
+        </p:txBody>
+      </p:sp>
+      <p:sp>
+        <p:nvSpPr>
+          <p:cNvPr id="16" name="TextBox 15"/>
+          <p:cNvSpPr txBox="1"/>
+          <p:nvPr/>
+        </p:nvSpPr>
+        <p:spPr>
+          <a:xfrm>
+            <a:off x="1097280" y="5577840"/>
+            <a:ext cx="4754880" cy="365760"/>
+          </a:xfrm>
+          <a:prstGeom prst="rect">
+            <a:avLst/>
+          </a:prstGeom>
+          <a:noFill/>
+        </p:spPr>
+        <p:txBody>
+          <a:bodyPr wrap="square">
+            <a:spAutoFit/>
+          </a:bodyPr>
+          <a:lstStyle/>
+          <a:p>
+            <a:pPr algn="l"/>
+            <a:r>
+              <a:rPr sz="1300" b="0">
+                <a:solidFill>
+                  <a:srgbClr val="D6E4F5"/>
+                </a:solidFill>
+                <a:latin typeface="Microsoft YaHei"/>
+                <a:ea typeface="Microsoft YaHei"/>
+              </a:rPr>
+              <a:t>· 点评 = 参考要点关键词命中</a:t>
+            </a:r>
+          </a:p>
+        </p:txBody>
+      </p:sp>
+      <p:sp>
+        <p:nvSpPr>
+          <p:cNvPr id="17" name="TextBox 16"/>
+          <p:cNvSpPr txBox="1"/>
+          <p:nvPr/>
+        </p:nvSpPr>
+        <p:spPr>
+          <a:xfrm>
+            <a:off x="1097280" y="5897880"/>
+            <a:ext cx="4754880" cy="365760"/>
+          </a:xfrm>
+          <a:prstGeom prst="rect">
+            <a:avLst/>
+          </a:prstGeom>
+          <a:noFill/>
+        </p:spPr>
+        <p:txBody>
+          <a:bodyPr wrap="square">
+            <a:spAutoFit/>
+          </a:bodyPr>
+          <a:lstStyle/>
+          <a:p>
+            <a:pPr algn="l"/>
+            <a:r>
+              <a:rPr sz="1300" b="0">
+                <a:solidFill>
+                  <a:srgbClr val="8FB0D4"/>
+                </a:solidFill>
+                <a:latin typeface="Consolas"/>
+                <a:ea typeface="Consolas"/>
+              </a:rPr>
+              <a:t>Question: content + reference_points(JSON)</a:t>
+            </a:r>
+          </a:p>
+        </p:txBody>
+      </p:sp>
+      <p:sp>
+        <p:nvSpPr>
+          <p:cNvPr id="18" name="Rounded Rectangle 17"/>
           <p:cNvSpPr/>
           <p:nvPr/>
         </p:nvSpPr>
         <p:spPr>
           <a:xfrm>
-            <a:off x="6309360" y="1737360"/>
-            <a:ext cx="5120640" cy="4206240"/>
-          </a:xfrm>
-          <a:prstGeom prst="rect">
+            <a:off x="6400800" y="1645920"/>
+            <a:ext cx="5029200" cy="4480560"/>
+          </a:xfrm>
+          <a:prstGeom prst="roundRect">
             <a:avLst/>
           </a:prstGeom>
           <a:solidFill>
@@ -11789,13 +13405,13 @@
       </p:sp>
       <p:sp>
         <p:nvSpPr>
-          <p:cNvPr id="10" name="TextBox 9"/>
-          <p:cNvSpPr txBox="1"/>
-          <p:nvPr/>
-        </p:nvSpPr>
-        <p:spPr>
-          <a:xfrm>
-            <a:off x="6583680" y="1920240"/>
+          <p:cNvPr id="19" name="TextBox 18"/>
+          <p:cNvSpPr txBox="1"/>
+          <p:nvPr/>
+        </p:nvSpPr>
+        <p:spPr>
+          <a:xfrm>
+            <a:off x="6675120" y="1828800"/>
             <a:ext cx="4572000" cy="457200"/>
           </a:xfrm>
           <a:prstGeom prst="rect">
@@ -11804,7 +13420,7 @@
           <a:noFill/>
         </p:spPr>
         <p:txBody>
-          <a:bodyPr wrap="square" anchor="t">
+          <a:bodyPr wrap="square">
             <a:spAutoFit/>
           </a:bodyPr>
           <a:lstStyle/>
@@ -11825,22 +13441,22 @@
       </p:sp>
       <p:sp>
         <p:nvSpPr>
-          <p:cNvPr id="11" name="TextBox 10"/>
-          <p:cNvSpPr txBox="1"/>
-          <p:nvPr/>
-        </p:nvSpPr>
-        <p:spPr>
-          <a:xfrm>
-            <a:off x="6583680" y="2468880"/>
-            <a:ext cx="4572000" cy="3291840"/>
-          </a:xfrm>
-          <a:prstGeom prst="rect">
-            <a:avLst/>
-          </a:prstGeom>
-          <a:noFill/>
-        </p:spPr>
-        <p:txBody>
-          <a:bodyPr wrap="square" anchor="t">
+          <p:cNvPr id="20" name="TextBox 19"/>
+          <p:cNvSpPr txBox="1"/>
+          <p:nvPr/>
+        </p:nvSpPr>
+        <p:spPr>
+          <a:xfrm>
+            <a:off x="6675120" y="2377440"/>
+            <a:ext cx="4572000" cy="3474720"/>
+          </a:xfrm>
+          <a:prstGeom prst="rect">
+            <a:avLst/>
+          </a:prstGeom>
+          <a:noFill/>
+        </p:spPr>
+        <p:txBody>
+          <a:bodyPr wrap="square">
             <a:spAutoFit/>
           </a:bodyPr>
           <a:lstStyle/>
@@ -11861,6 +13477,42 @@
 interviews.submit
   → engine.evaluate
     ← 点评文本</a:t>
+            </a:r>
+          </a:p>
+        </p:txBody>
+      </p:sp>
+      <p:sp>
+        <p:nvSpPr>
+          <p:cNvPr id="21" name="TextBox 20"/>
+          <p:cNvSpPr txBox="1"/>
+          <p:nvPr/>
+        </p:nvSpPr>
+        <p:spPr>
+          <a:xfrm>
+            <a:off x="6675120" y="5897880"/>
+            <a:ext cx="4572000" cy="365760"/>
+          </a:xfrm>
+          <a:prstGeom prst="rect">
+            <a:avLst/>
+          </a:prstGeom>
+          <a:noFill/>
+        </p:spPr>
+        <p:txBody>
+          <a:bodyPr wrap="square">
+            <a:spAutoFit/>
+          </a:bodyPr>
+          <a:lstStyle/>
+          <a:p>
+            <a:pPr algn="l"/>
+            <a:r>
+              <a:rPr sz="1300" b="0">
+                <a:solidFill>
+                  <a:srgbClr val="FFB74D"/>
+                </a:solidFill>
+                <a:latin typeface="Microsoft YaHei"/>
+                <a:ea typeface="Microsoft YaHei"/>
+              </a:rPr>
+              <a:t>点评确定性：同输入同输出，可复现</a:t>
             </a:r>
           </a:p>
         </p:txBody>
